--- a/docs/webinar/E2E-4/E2E-4-diapositivas.pptx
+++ b/docs/webinar/E2E-4/E2E-4-diapositivas.pptx
@@ -147,12 +147,12 @@
   <p:extLst>
     <p:ext uri="{521415D9-36F7-43E2-AB2F-B90AF26B5E84}">
       <p14:sectionLst xmlns:p14="http://schemas.microsoft.com/office/powerpoint/2010/main">
-        <p14:section name="Portada" id="{65635ddc-4c45-9eeb-2c95-99e987f8fc25}">
+        <p14:section name="Portada" id="{acca572a-fdb7-0a3b-b05b-7d38fd756df9}">
           <p14:sldIdLst>
             <p14:sldId id="256"/>
           </p14:sldIdLst>
         </p14:section>
-        <p14:section name="Clase 1 · Gobernar la construcción con BMAD" id="{e1dd3a9a-e309-64fe-7cc8-43fd5bc2bc2f}">
+        <p14:section name="Clase 1 · Gobernar la construcción con BMAD" id="{42fdd87a-61fa-db98-f4e5-b91c4b0afb53}">
           <p14:sldIdLst>
             <p14:sldId id="257"/>
             <p14:sldId id="258"/>
@@ -173,7 +173,7 @@
             <p14:sldId id="273"/>
           </p14:sldIdLst>
         </p14:section>
-        <p14:section name="Clase 2 · Calidad a volumen, recorrido, cierre y beneficios" id="{d66cce63-440e-966b-1f11-385d4316e8cf}">
+        <p14:section name="Clase 2 · Calidad a volumen, recorrido, cierre y beneficios" id="{65c73bf2-109c-0023-78e4-1c3d4ad88485}">
           <p14:sldIdLst>
             <p14:sldId id="274"/>
             <p14:sldId id="275"/>
@@ -198,7 +198,7 @@
             <p14:sldId id="294"/>
           </p14:sldIdLst>
         </p14:section>
-        <p14:section name="Glosario" id="{43c30d31-98b2-9fa9-9c3a-e9171e30b39d}">
+        <p14:section name="Glosario" id="{a61d6887-cf3b-c272-3d33-5446559373a3}">
           <p14:sldIdLst>
             <p14:sldId id="295"/>
             <p14:sldId id="296"/>
@@ -1312,7 +1312,7 @@
           <a:p>
             <a:r>
               <a:rPr lang="en-US" dirty="0"/>
-              <a:t>Hoja en docs/webinar/E2E-4/ejercicio.md. Al final mostrá la solución de referencia con la condición de NFR-3 y C-001.</a:t>
+              <a:t>Hoja en docs/webinar/E2E-4/ejercicio.md. Al terminar mostrá el ejemplo resuelto de la hoja: la condición de NFR-3 y C-001.</a:t>
             </a:r>
             <a:endParaRPr lang="en-US" dirty="0"/>
           </a:p>
@@ -3336,7 +3336,7 @@
           <a:p>
             <a:r>
               <a:rPr lang="en-US" dirty="0"/>
-              <a:t>Hoja en docs/webinar/E2E-4/ejercicio.md. La solución de referencia usa el recorrido de UJ-1 y los beneficios B-02 y B-01 del caso.</a:t>
+              <a:t>Hoja en docs/webinar/E2E-4/ejercicio.md. El ejemplo resuelto de la hoja usa el recorrido de UJ-1 y los beneficios B-02 y B-01 del caso; mostralo al terminar.</a:t>
             </a:r>
             <a:endParaRPr lang="en-US" dirty="0"/>
           </a:p>

--- a/docs/webinar/E2E-4/E2E-4-diapositivas.pptx
+++ b/docs/webinar/E2E-4/E2E-4-diapositivas.pptx
@@ -152,12 +152,12 @@
   <p:extLst>
     <p:ext uri="{521415D9-36F7-43E2-AB2F-B90AF26B5E84}">
       <p14:sectionLst xmlns:p14="http://schemas.microsoft.com/office/powerpoint/2010/main">
-        <p14:section name="Portada" id="{86c49d6e-d92b-2d9d-1f7e-a4ea3cf43f42}">
+        <p14:section name="Portada" id="{90568f49-9ed7-fdb3-53e0-d5f76b3942a1}">
           <p14:sldIdLst>
             <p14:sldId id="256"/>
           </p14:sldIdLst>
         </p14:section>
-        <p14:section name="Clase 1 · Gobernar la construcción con BMAD" id="{584b66cf-8929-fd22-429d-5a37da65bd5d}">
+        <p14:section name="Clase 1 · Gobernar la construcción con BMAD" id="{cabd0292-a0e5-cd48-bd39-e01c2c3255c8}">
           <p14:sldIdLst>
             <p14:sldId id="257"/>
             <p14:sldId id="258"/>
@@ -182,7 +182,7 @@
             <p14:sldId id="277"/>
           </p14:sldIdLst>
         </p14:section>
-        <p14:section name="Clase 2 · Recorrido, lecciones, cierre y beneficios" id="{7d660dfa-1a62-3b32-7150-b0c24039f860}">
+        <p14:section name="Clase 2 · Recorrido, lecciones, cierre y beneficios" id="{79d74b50-9693-545d-c3b5-2c053912a743}">
           <p14:sldIdLst>
             <p14:sldId id="278"/>
             <p14:sldId id="279"/>
@@ -207,7 +207,7 @@
             <p14:sldId id="298"/>
           </p14:sldIdLst>
         </p14:section>
-        <p14:section name="Glosario" id="{36742c73-1c67-c8eb-6c5e-fe8e4e6c7d2b}">
+        <p14:section name="Glosario" id="{316f40d0-082b-a36a-ab86-ccddbef06e55}">
           <p14:sldIdLst>
             <p14:sldId id="299"/>
             <p14:sldId id="300"/>
@@ -4809,7 +4809,7 @@
                   <a:srgbClr val="D6E4F0"/>
                 </a:solidFill>
               </a:rPr>
-              <a:t>pm-method 2.4.0 · Webinar E2E-4 · Clase 1</a:t>
+              <a:t>pm-method 2.5.0 · Webinar E2E-4 · Clase 1</a:t>
             </a:r>
             <a:endParaRPr lang="en-US" sz="1000" dirty="0"/>
           </a:p>
@@ -5049,7 +5049,7 @@
                   <a:srgbClr val="696969"/>
                 </a:solidFill>
               </a:rPr>
-              <a:t>pm-method 2.4.0 · Webinar E2E-4 · Clase 2</a:t>
+              <a:t>pm-method 2.5.0 · Webinar E2E-4 · Clase 2</a:t>
             </a:r>
             <a:endParaRPr lang="en-US" sz="1000" dirty="0"/>
           </a:p>
@@ -5267,7 +5267,7 @@
                   <a:srgbClr val="D6E4F0"/>
                 </a:solidFill>
               </a:rPr>
-              <a:t>pm-method 2.4.0 · Webinar E2E-4 · Clase 2</a:t>
+              <a:t>pm-method 2.5.0 · Webinar E2E-4 · Clase 2</a:t>
             </a:r>
             <a:endParaRPr lang="en-US" sz="1000" dirty="0"/>
           </a:p>
@@ -5485,7 +5485,7 @@
                   <a:srgbClr val="D6E4F0"/>
                 </a:solidFill>
               </a:rPr>
-              <a:t>pm-method 2.4.0 · Webinar E2E-4 · Clase 2</a:t>
+              <a:t>pm-method 2.5.0 · Webinar E2E-4 · Clase 2</a:t>
             </a:r>
             <a:endParaRPr lang="en-US" sz="1000" dirty="0"/>
           </a:p>
@@ -5703,7 +5703,7 @@
                   <a:srgbClr val="D6E4F0"/>
                 </a:solidFill>
               </a:rPr>
-              <a:t>pm-method 2.4.0 · Webinar E2E-4 · Clase 2</a:t>
+              <a:t>pm-method 2.5.0 · Webinar E2E-4 · Clase 2</a:t>
             </a:r>
             <a:endParaRPr lang="en-US" sz="1000" dirty="0"/>
           </a:p>
@@ -5879,7 +5879,7 @@
                   <a:srgbClr val="D6E4F0"/>
                 </a:solidFill>
               </a:rPr>
-              <a:t>pm-method 2.4.0 · Webinar E2E-4</a:t>
+              <a:t>pm-method 2.5.0 · Webinar E2E-4</a:t>
             </a:r>
             <a:endParaRPr lang="en-US" sz="1000" dirty="0"/>
           </a:p>
@@ -6074,7 +6074,7 @@
                   <a:srgbClr val="696969"/>
                 </a:solidFill>
               </a:rPr>
-              <a:t>pm-method 2.4.0 · Webinar E2E-4</a:t>
+              <a:t>pm-method 2.5.0 · Webinar E2E-4</a:t>
             </a:r>
             <a:endParaRPr lang="en-US" sz="1000" dirty="0"/>
           </a:p>
@@ -6292,7 +6292,7 @@
                   <a:srgbClr val="D6E4F0"/>
                 </a:solidFill>
               </a:rPr>
-              <a:t>pm-method 2.4.0 · Webinar E2E-4</a:t>
+              <a:t>pm-method 2.5.0 · Webinar E2E-4</a:t>
             </a:r>
             <a:endParaRPr lang="en-US" sz="1000" dirty="0"/>
           </a:p>
@@ -6510,7 +6510,7 @@
                   <a:srgbClr val="D6E4F0"/>
                 </a:solidFill>
               </a:rPr>
-              <a:t>pm-method 2.4.0 · Webinar E2E-4</a:t>
+              <a:t>pm-method 2.5.0 · Webinar E2E-4</a:t>
             </a:r>
             <a:endParaRPr lang="en-US" sz="1000" dirty="0"/>
           </a:p>
@@ -6728,7 +6728,7 @@
                   <a:srgbClr val="D6E4F0"/>
                 </a:solidFill>
               </a:rPr>
-              <a:t>pm-method 2.4.0 · Webinar E2E-4</a:t>
+              <a:t>pm-method 2.5.0 · Webinar E2E-4</a:t>
             </a:r>
             <a:endParaRPr lang="en-US" sz="1000" dirty="0"/>
           </a:p>
@@ -6968,7 +6968,7 @@
                   <a:srgbClr val="696969"/>
                 </a:solidFill>
               </a:rPr>
-              <a:t>pm-method 2.4.0 · Webinar E2E-4 · Clase 1</a:t>
+              <a:t>pm-method 2.5.0 · Webinar E2E-4 · Clase 1</a:t>
             </a:r>
             <a:endParaRPr lang="en-US" sz="1000" dirty="0"/>
           </a:p>
@@ -7186,7 +7186,7 @@
                   <a:srgbClr val="D6E4F0"/>
                 </a:solidFill>
               </a:rPr>
-              <a:t>pm-method 2.4.0 · Webinar E2E-4 · Clase 1</a:t>
+              <a:t>pm-method 2.5.0 · Webinar E2E-4 · Clase 1</a:t>
             </a:r>
             <a:endParaRPr lang="en-US" sz="1000" dirty="0"/>
           </a:p>
@@ -7404,7 +7404,7 @@
                   <a:srgbClr val="D6E4F0"/>
                 </a:solidFill>
               </a:rPr>
-              <a:t>pm-method 2.4.0 · Webinar E2E-4 · Clase 1</a:t>
+              <a:t>pm-method 2.5.0 · Webinar E2E-4 · Clase 1</a:t>
             </a:r>
             <a:endParaRPr lang="en-US" sz="1000" dirty="0"/>
           </a:p>
@@ -7848,7 +7848,7 @@
                 <a:ea typeface="Arial" pitchFamily="34" charset="-122"/>
                 <a:cs typeface="Arial" pitchFamily="34" charset="-120"/>
               </a:rPr>
-              <a:t>Webinar · pm-method 2.4.0 · E2E-4</a:t>
+              <a:t>Webinar · pm-method 2.5.0 · E2E-4</a:t>
             </a:r>
             <a:endParaRPr lang="en-US" sz="1600" dirty="0"/>
           </a:p>

--- a/docs/webinar/E2E-4/E2E-4-diapositivas.pptx
+++ b/docs/webinar/E2E-4/E2E-4-diapositivas.pptx
@@ -152,12 +152,12 @@
   <p:extLst>
     <p:ext uri="{521415D9-36F7-43E2-AB2F-B90AF26B5E84}">
       <p14:sectionLst xmlns:p14="http://schemas.microsoft.com/office/powerpoint/2010/main">
-        <p14:section name="Portada" id="{90568f49-9ed7-fdb3-53e0-d5f76b3942a1}">
+        <p14:section name="Portada" id="{994dcd81-9a37-5a86-db3b-82fa6a7a6c16}">
           <p14:sldIdLst>
             <p14:sldId id="256"/>
           </p14:sldIdLst>
         </p14:section>
-        <p14:section name="Clase 1 · Gobernar la construcción con BMAD" id="{cabd0292-a0e5-cd48-bd39-e01c2c3255c8}">
+        <p14:section name="Clase 1 · Gobernar la construcción con BMAD" id="{7c5e6377-db45-08ef-851c-814e0157400d}">
           <p14:sldIdLst>
             <p14:sldId id="257"/>
             <p14:sldId id="258"/>
@@ -182,7 +182,7 @@
             <p14:sldId id="277"/>
           </p14:sldIdLst>
         </p14:section>
-        <p14:section name="Clase 2 · Recorrido, lecciones, cierre y beneficios" id="{79d74b50-9693-545d-c3b5-2c053912a743}">
+        <p14:section name="Clase 2 · Recorrido, lecciones, cierre y beneficios" id="{d15f33fe-5c8f-d5ac-0b3a-f66875daeb1f}">
           <p14:sldIdLst>
             <p14:sldId id="278"/>
             <p14:sldId id="279"/>
@@ -207,7 +207,7 @@
             <p14:sldId id="298"/>
           </p14:sldIdLst>
         </p14:section>
-        <p14:section name="Glosario" id="{316f40d0-082b-a36a-ab86-ccddbef06e55}">
+        <p14:section name="Glosario" id="{744a4bf5-aa5a-38e2-ba88-80c0afc55026}">
           <p14:sldIdLst>
             <p14:sldId id="299"/>
             <p14:sldId id="300"/>
@@ -1938,7 +1938,7 @@
           <a:p>
             <a:r>
               <a:rPr lang="en-US" dirty="0"/>
-              <a:t>Clase 2 (90 minutos): Recorrido, lecciones, cierre y beneficios. Objetivos: Dar a cada dolor del recorrido un tratamiento con id; Llevar una lección de la retrospectiva hasta el cambio verificado; Cerrar verificado por id (C-03, C-07), con informe de lecciones y expediente verificable; Leer beneficios con puntaje, salud y tolerancia.</a:t>
+              <a:t>Clase 2 (90 minutos): Recorrido, lecciones, cierre y beneficios. Objetivos: Dar a cada dolor del recorrido un tratamiento con id; Llevar una lección de la retrospectiva hasta el cambio verificado; Cerrar verificado por id (C-03, C-07), con informe de lecciones y expediente con bitácora; Leer beneficios con puntaje, salud y tolerancia.</a:t>
             </a:r>
             <a:endParaRPr lang="en-US" dirty="0"/>
           </a:p>
@@ -2642,7 +2642,7 @@
           <a:p>
             <a:r>
               <a:rPr lang="en-US" dirty="0"/>
-              <a:t>El recorrido mira lo entregado desde la persona; las tres filas del medio son el ciclo de las lecciones (capturar, llevar al plan, verificar); el expediente sale de los registros cuando la auditoría lo pide; la última es la responsabilidad de los beneficios, que se exige desde la puerta de proyecto con P-04.</a:t>
+              <a:t>El recorrido mira lo entregado desde la persona; las tres filas del medio son el ciclo de las lecciones (capturar, llevar al plan, verificar); el expediente sale de los registros cuando la auditoría lo pide y lleva la bitácora, que dice si un cambio salió de los scripts; la última es la responsabilidad de los beneficios, que se exige desde la puerta de proyecto con P-04.</a:t>
             </a:r>
             <a:endParaRPr lang="en-US" dirty="0"/>
           </a:p>
@@ -2730,7 +2730,7 @@
           <a:p>
             <a:r>
               <a:rPr lang="en-US" dirty="0"/>
-              <a:t>Pasos 6b, 6c, 7 y 8 en vivo; el 9 y el 9b con la evidencia; el 10 en vivo y el 11 con la evidencia.</a:t>
+              <a:t>Pasos 6b, 6c, 7 y 8 en vivo; el 9, el 9b y el 9c con la evidencia; el 10 en vivo y el 11 con la evidencia.</a:t>
             </a:r>
             <a:endParaRPr lang="en-US" dirty="0"/>
           </a:p>
@@ -2994,7 +2994,7 @@
           <a:p>
             <a:r>
               <a:rPr lang="en-US" dirty="0"/>
-              <a:t>La verificación de la puerta avisa E-11 hasta que el plan de la etapa 3 incorpora L-003 con su acción y fecha de verificación (12/5); el informe de lecciones de la etapa 2 sale del registro. La condición tampoco se cierra sola: alguien con rol la verifica y queda en decisiones.csv. El tablero del 5/3 muestra el recorrido de la socia en su sección de mapas (g4-tablero-mapas-169.png en la guía).</a:t>
+              <a:t>La verificación de la puerta avisa E-11 hasta que el plan de la etapa 3 incorpora L-003 con su acción y fecha de verificación (12/5); el informe de lecciones de la etapa 2 sale del registro. La condición tampoco se cierra sola: alguien con rol la verifica y queda en decisiones.csv. Antes de la puerta, el PASS se marca como reemplazo del CONCERNS (mismo nivel) y decision.py vigentes --tema BMAD muestra lo que rige: D-013 condicionada, las líneas base 1.1 (cadenas D-010 → D-016 y D-011 → D-017, marcadas solas al aprobarlas) y D-018 con la cadena D-012 → D-018. El tablero del 5/3 muestra el recorrido de la socia en su sección de mapas (g4-tablero-mapas-169.png en la guía).</a:t>
             </a:r>
             <a:endParaRPr lang="en-US" dirty="0"/>
           </a:p>
@@ -3082,7 +3082,7 @@
           <a:p>
             <a:r>
               <a:rPr lang="en-US" dirty="0"/>
-              <a:t>Primero el contraste: la misma herramienta sobre la planificación del sprint 5 propone 1 compromiso y 1 decisión y ninguna lección. Al 22/3 vence la verificación de L-002 y la sanidad y el radar la muestran; con la evidencia del sprint 5 queda verificada. Después, el rechazo de la 2-4 se trata con I-002 y Q-013; al cerrar el Release 2, L-003 se verifica con esa misma evidencia: el rechazo entró como issue sin tocar la especificación.</a:t>
+              <a:t>Primero el contraste: la misma herramienta sobre la planificación del sprint 5 propone 1 compromiso y 1 decisión y ninguna lección. Al 22/3 vence la verificación de L-002 y la sanidad y el radar la muestran; con la evidencia del sprint 5 queda verificada. Después, el rechazo de la 2-4: PRINCE2 admite corregir o conceder; la matriz de pm-direccion-decisiones las compara (impacto 40, tolerancias 35, autoridad 25, cada puntaje con su fuente), recomienda corregir con 81,2 contra 63,7 (conceder ganaría solo si el peso del impacto bajara a 7,7) y Sofía, autoridad de cambio, elige: D-022. Se corrige con I-002 y Q-013; al cerrar el Release 2, L-003 se verifica con esa misma evidencia: el rechazo entró como issue sin tocar la especificación.</a:t>
             </a:r>
             <a:endParaRPr lang="en-US" dirty="0"/>
           </a:p>
@@ -3258,7 +3258,7 @@
           <a:p>
             <a:r>
               <a:rPr lang="en-US" dirty="0"/>
-              <a:t>Paso 9: verificación de cierre solo con L-01, la lista de la junta (sin G-01 ni C-03: R-001 pasó al negocio en las recomendaciones de seguimiento), paquete de cierre completo con la línea base del PRD y D-027, que traspasa los beneficios al negocio. Paso 9b: Andrea Costa, de aseguramiento, pide el expediente para la auditoría externa: 41 eventos en la cronología, 16 copias congeladas, 8 registros sin el de interesados (--externo) e INTEGRIDAD: OK con 43 archivos. En la copia que recibió la auditoría, D-013 dice «aprobado» en lugar de «condicionado»: la verificación falla en decisiones.csv. Preguntá: ¿cómo probarían hoy que la evidencia que entregaron no se editó?</a:t>
+              <a:t>Paso 9: verificación de cierre solo con L-01, la lista de la junta (sin G-01 ni C-03: R-001 pasó al negocio en las recomendaciones de seguimiento), paquete de cierre completo con la línea base del PRD y D-028, que traspasa los beneficios al negocio. Paso 9b: Andrea Costa, de aseguramiento, pide el expediente para la auditoría externa con la bitácora de escrituras: 42 eventos en la cronología, 16 copias congeladas, 8 registros sin el de interesados (--externo), 132 escrituras en la bitácora e INTEGRIDAD: OK con 44 archivos. En la copia que recibió la auditoría, D-013 dice «aprobado» en lugar de «condicionado»: la verificación falla en decisiones.csv y explica que la última escritura anotada dejó otra versión: el cambio no salió de los scripts. registro.py historial D-013 muestra una sola escritura, la de la puerta, con «condicionado». Preguntá: ¿cómo probarían hoy quién escribió cada fila de la evidencia que entregaron?</a:t>
             </a:r>
             <a:endParaRPr lang="en-US" dirty="0"/>
           </a:p>
@@ -3346,7 +3346,7 @@
           <a:p>
             <a:r>
               <a:rPr lang="en-US" dirty="0"/>
-              <a:t>Si miráramos solo el semáforo del OKR, alguien declararía fracasado el portal a seis semanas de salir. Comparado con la trayectoria, va en camino. Los check-ins solo se agregan: queda la historia de cada medición.</a:t>
+              <a:t>Opcional: requiere pm-kb (INSTALACION-WSL2.md §8 o INSTALACION-DOCKER.md §8). Con evidencia: pm-kb versiones business-case muestra v1.0 (27/11), v1.1 (5/3) y v1.2 (14/5) con quién aprobó y su copia congelada; pm-kb cambios business-case compara por secciones, y como el título cambió, la sección vieja figura quitada y la nueva agregada. La misma búsqueda por defecto, con --aprobado y con --historia: solo la última trae la 1.1, marcada «versión anterior», con el veredicto de la etapa 2. pm-kb ficha D-013 --historia muestra la misma escritura que registro.py historial en el paso 9b. Si la última versión de un documento estuviera en revisión, la búsqueda por defecto avisaría «hay una vX aprobada».</a:t>
             </a:r>
             <a:endParaRPr lang="en-US" dirty="0"/>
           </a:p>
@@ -3434,7 +3434,7 @@
           <a:p>
             <a:r>
               <a:rPr lang="en-US" dirty="0"/>
-              <a:t>Revisión final: B-02 llega a 83 % de la meta, por debajo del 90 % que admite la tolerancia de −10 %. B-01 (93 %) y B-03 (96 %) quedan dentro. D-029 informa a la ejecutiva y dice por dónde empezar: R-001, el dolor del primer ingreso que dejó el mapa del paso 6b.</a:t>
+              <a:t>Si miráramos solo el semáforo del OKR, alguien declararía fracasado el portal a seis semanas de salir. Comparado con la trayectoria, va en camino. Los check-ins solo se agregan: queda la historia de cada medición.</a:t>
             </a:r>
             <a:endParaRPr lang="en-US" dirty="0"/>
           </a:p>
@@ -3610,7 +3610,7 @@
           <a:p>
             <a:r>
               <a:rPr lang="en-US" dirty="0"/>
-              <a:t>Respuesta esperada: no. El promedio esconde que B-02 adopción quedó en 0,83, fuera de la tolerancia. Por eso el criterio del plan se aplica beneficio por beneficio.</a:t>
+              <a:t>Antes de mostrar la imagen, preguntá: «Al 31/12 el objetivo O-1 sale 0,91 en verde. ¿Está todo bien?». Respuesta esperada: no; el promedio esconde un beneficio fuera de tolerancia, y por eso el criterio del plan se aplica beneficio por beneficio. Revisión final: B-02 llega a 83 % de la meta, por debajo del 90 % que admite la tolerancia de −10 %. B-01 (93 %) y B-03 (96 %) quedan dentro. D-030 informa a la ejecutiva y dice por dónde empezar: R-001, el dolor del primer ingreso que dejó el mapa del paso 6b.</a:t>
             </a:r>
             <a:endParaRPr lang="en-US" dirty="0"/>
           </a:p>
@@ -3698,7 +3698,7 @@
           <a:p>
             <a:r>
               <a:rPr lang="en-US" dirty="0"/>
-              <a:t>Cerrá con la idea central: lo que en la práctica se hace una vez o nunca se controla en cada sanidad o en cada revisión.</a:t>
+              <a:t>Cerrá con la idea central: lo que en la práctica se hace una vez o nunca se controla en cada sanidad o en cada revisión. Y se decide con lo vigente: lo reemplazado queda en la historia, no en la mesa.</a:t>
             </a:r>
             <a:endParaRPr lang="en-US" dirty="0"/>
           </a:p>
@@ -4809,7 +4809,7 @@
                   <a:srgbClr val="D6E4F0"/>
                 </a:solidFill>
               </a:rPr>
-              <a:t>pm-method 2.5.0 · Webinar E2E-4 · Clase 1</a:t>
+              <a:t>pm-method 2.6.0 · Webinar E2E-4 · Clase 1</a:t>
             </a:r>
             <a:endParaRPr lang="en-US" sz="1000" dirty="0"/>
           </a:p>
@@ -5049,7 +5049,7 @@
                   <a:srgbClr val="696969"/>
                 </a:solidFill>
               </a:rPr>
-              <a:t>pm-method 2.5.0 · Webinar E2E-4 · Clase 2</a:t>
+              <a:t>pm-method 2.6.0 · Webinar E2E-4 · Clase 2</a:t>
             </a:r>
             <a:endParaRPr lang="en-US" sz="1000" dirty="0"/>
           </a:p>
@@ -5267,7 +5267,7 @@
                   <a:srgbClr val="D6E4F0"/>
                 </a:solidFill>
               </a:rPr>
-              <a:t>pm-method 2.5.0 · Webinar E2E-4 · Clase 2</a:t>
+              <a:t>pm-method 2.6.0 · Webinar E2E-4 · Clase 2</a:t>
             </a:r>
             <a:endParaRPr lang="en-US" sz="1000" dirty="0"/>
           </a:p>
@@ -5485,7 +5485,7 @@
                   <a:srgbClr val="D6E4F0"/>
                 </a:solidFill>
               </a:rPr>
-              <a:t>pm-method 2.5.0 · Webinar E2E-4 · Clase 2</a:t>
+              <a:t>pm-method 2.6.0 · Webinar E2E-4 · Clase 2</a:t>
             </a:r>
             <a:endParaRPr lang="en-US" sz="1000" dirty="0"/>
           </a:p>
@@ -5703,7 +5703,7 @@
                   <a:srgbClr val="D6E4F0"/>
                 </a:solidFill>
               </a:rPr>
-              <a:t>pm-method 2.5.0 · Webinar E2E-4 · Clase 2</a:t>
+              <a:t>pm-method 2.6.0 · Webinar E2E-4 · Clase 2</a:t>
             </a:r>
             <a:endParaRPr lang="en-US" sz="1000" dirty="0"/>
           </a:p>
@@ -5879,7 +5879,7 @@
                   <a:srgbClr val="D6E4F0"/>
                 </a:solidFill>
               </a:rPr>
-              <a:t>pm-method 2.5.0 · Webinar E2E-4</a:t>
+              <a:t>pm-method 2.6.0 · Webinar E2E-4</a:t>
             </a:r>
             <a:endParaRPr lang="en-US" sz="1000" dirty="0"/>
           </a:p>
@@ -6074,7 +6074,7 @@
                   <a:srgbClr val="696969"/>
                 </a:solidFill>
               </a:rPr>
-              <a:t>pm-method 2.5.0 · Webinar E2E-4</a:t>
+              <a:t>pm-method 2.6.0 · Webinar E2E-4</a:t>
             </a:r>
             <a:endParaRPr lang="en-US" sz="1000" dirty="0"/>
           </a:p>
@@ -6292,7 +6292,7 @@
                   <a:srgbClr val="D6E4F0"/>
                 </a:solidFill>
               </a:rPr>
-              <a:t>pm-method 2.5.0 · Webinar E2E-4</a:t>
+              <a:t>pm-method 2.6.0 · Webinar E2E-4</a:t>
             </a:r>
             <a:endParaRPr lang="en-US" sz="1000" dirty="0"/>
           </a:p>
@@ -6510,7 +6510,7 @@
                   <a:srgbClr val="D6E4F0"/>
                 </a:solidFill>
               </a:rPr>
-              <a:t>pm-method 2.5.0 · Webinar E2E-4</a:t>
+              <a:t>pm-method 2.6.0 · Webinar E2E-4</a:t>
             </a:r>
             <a:endParaRPr lang="en-US" sz="1000" dirty="0"/>
           </a:p>
@@ -6728,7 +6728,7 @@
                   <a:srgbClr val="D6E4F0"/>
                 </a:solidFill>
               </a:rPr>
-              <a:t>pm-method 2.5.0 · Webinar E2E-4</a:t>
+              <a:t>pm-method 2.6.0 · Webinar E2E-4</a:t>
             </a:r>
             <a:endParaRPr lang="en-US" sz="1000" dirty="0"/>
           </a:p>
@@ -6968,7 +6968,7 @@
                   <a:srgbClr val="696969"/>
                 </a:solidFill>
               </a:rPr>
-              <a:t>pm-method 2.5.0 · Webinar E2E-4 · Clase 1</a:t>
+              <a:t>pm-method 2.6.0 · Webinar E2E-4 · Clase 1</a:t>
             </a:r>
             <a:endParaRPr lang="en-US" sz="1000" dirty="0"/>
           </a:p>
@@ -7186,7 +7186,7 @@
                   <a:srgbClr val="D6E4F0"/>
                 </a:solidFill>
               </a:rPr>
-              <a:t>pm-method 2.5.0 · Webinar E2E-4 · Clase 1</a:t>
+              <a:t>pm-method 2.6.0 · Webinar E2E-4 · Clase 1</a:t>
             </a:r>
             <a:endParaRPr lang="en-US" sz="1000" dirty="0"/>
           </a:p>
@@ -7404,7 +7404,7 @@
                   <a:srgbClr val="D6E4F0"/>
                 </a:solidFill>
               </a:rPr>
-              <a:t>pm-method 2.5.0 · Webinar E2E-4 · Clase 1</a:t>
+              <a:t>pm-method 2.6.0 · Webinar E2E-4 · Clase 1</a:t>
             </a:r>
             <a:endParaRPr lang="en-US" sz="1000" dirty="0"/>
           </a:p>
@@ -7848,7 +7848,7 @@
                 <a:ea typeface="Arial" pitchFamily="34" charset="-122"/>
                 <a:cs typeface="Arial" pitchFamily="34" charset="-120"/>
               </a:rPr>
-              <a:t>Webinar · pm-method 2.5.0 · E2E-4</a:t>
+              <a:t>Webinar · pm-method 2.6.0 · E2E-4</a:t>
             </a:r>
             <a:endParaRPr lang="en-US" sz="1600" dirty="0"/>
           </a:p>
@@ -15666,7 +15666,7 @@
                 <a:ea typeface="Arial" pitchFamily="34" charset="-122"/>
                 <a:cs typeface="Arial" pitchFamily="34" charset="-120"/>
               </a:rPr>
-              <a:t>Cerrar verificado por id (C-03, C-07), con informe de lecciones y expediente verificable</a:t>
+              <a:t>Cerrar verificado por id (C-03, C-07), con informe de lecciones y expediente con bitácora</a:t>
             </a:r>
             <a:endParaRPr lang="en-US" sz="1600" dirty="0"/>
           </a:p>
@@ -20177,10 +20177,10 @@
             <a:tbl>
               <a:tblPr/>
               <a:tblGrid>
-                <a:gridCol w="2459902"/>
-                <a:gridCol w="2562398"/>
-                <a:gridCol w="4202333"/>
-                <a:gridCol w="2049919"/>
+                <a:gridCol w="2130624"/>
+                <a:gridCol w="2219400"/>
+                <a:gridCol w="4083696"/>
+                <a:gridCol w="2840832"/>
               </a:tblGrid>
               <a:tr h="0">
                 <a:tc>
@@ -21706,7 +21706,7 @@
                           <a:ea typeface="Arial" pitchFamily="34" charset="-122"/>
                           <a:cs typeface="Arial" pitchFamily="34" charset="-120"/>
                         </a:rPr>
-                        <a:t>expediente con sha256</a:t>
+                        <a:t>expediente con sha256 y bitácora de escrituras</a:t>
                       </a:r>
                       <a:endParaRPr lang="en-US" sz="1200" dirty="0">
                         <a:latin typeface="Arial" charset="0"/>
@@ -21774,7 +21774,7 @@
                           <a:ea typeface="Arial" pitchFamily="34" charset="-122"/>
                           <a:cs typeface="Arial" pitchFamily="34" charset="-120"/>
                         </a:rPr>
-                        <a:t>paquete.py verificar</a:t>
+                        <a:t>paquete.py verificar · BIT-01/02</a:t>
                       </a:r>
                       <a:endParaRPr lang="en-US" sz="1200" dirty="0">
                         <a:latin typeface="Arial" charset="0"/>
@@ -23331,7 +23331,7 @@
               <a:buNone/>
             </a:pPr>
             <a:r>
-              <a:rPr lang="en-US" sz="2350" b="1" dirty="0">
+              <a:rPr lang="en-US" sz="2300" b="1" dirty="0">
                 <a:solidFill>
                   <a:srgbClr val="FFFFFF"/>
                 </a:solidFill>
@@ -23339,7 +23339,7 @@
                 <a:ea typeface="Arial" pitchFamily="34" charset="-122"/>
                 <a:cs typeface="Arial" pitchFamily="34" charset="-120"/>
               </a:rPr>
-              <a:t>Paso 7 · Lección en el plan, condición cumplida y puerta</a:t>
+              <a:t>Paso 7 · Condición cumplida, decisiones vigentes y puerta</a:t>
             </a:r>
             <a:endParaRPr lang="en-US" sz="2400" dirty="0"/>
           </a:p>
@@ -23393,11 +23393,11 @@
         <p:spPr>
           <a:xfrm>
             <a:off x="457200" y="1627632"/>
-            <a:ext cx="11274552" cy="1948434"/>
+            <a:ext cx="11274552" cy="2051622"/>
           </a:xfrm>
           <a:prstGeom prst="roundRect">
             <a:avLst>
-              <a:gd name="adj" fmla="val 3754"/>
+              <a:gd name="adj" fmla="val 3566"/>
             </a:avLst>
           </a:prstGeom>
           <a:solidFill>
@@ -23420,7 +23420,7 @@
         <p:spPr>
           <a:xfrm>
             <a:off x="685800" y="1792224"/>
-            <a:ext cx="10817352" cy="1619250"/>
+            <a:ext cx="10817352" cy="1722438"/>
           </a:xfrm>
           <a:prstGeom prst="rect">
             <a:avLst/>
@@ -23436,7 +23436,7 @@
               <a:buNone/>
             </a:pPr>
             <a:r>
-              <a:rPr lang="en-US" sz="1700" dirty="0">
+              <a:rPr lang="en-US" sz="1550" dirty="0">
                 <a:solidFill>
                   <a:srgbClr val="E8EEF5"/>
                 </a:solidFill>
@@ -23444,9 +23444,9 @@
                 <a:ea typeface="Courier New" pitchFamily="34" charset="-122"/>
                 <a:cs typeface="Courier New" pitchFamily="34" charset="-120"/>
               </a:rPr>
-              <a:t>La prueba de carga de NFR-3 se hizo el 2/3: p95 2,4 s con 400 sesiones concurrentes (meta menor a 3 s); aprobada. El gate de preparación de BMAD dio PASS el 3/3. Terminamos el Release 1: traé el avance al 5/3, abrí el límite de etapa, calculá el valor ganado (PV 82.000, EV 80.000, AC 83.500, BAC 130.000) y guardá el corte, actualizá el business case con reales y pronóstico, armá el informe de fin de etapa, el plan de la etapa 3 y el tablero con el recorrido de la socia, y preparame la puerta.</a:t>
-            </a:r>
-            <a:endParaRPr lang="en-US" sz="1700" dirty="0"/>
+              <a:t>La prueba de carga de NFR-3 se hizo el 2/3: p95 2,4 s con 400 sesiones concurrentes (meta menor a 3 s); aprobada. El gate de preparación de BMAD dio PASS el 3/3: reemplaza al CONCERNS del 26/11. Terminamos el Release 1: traé el avance al 5/3, abrí el límite de etapa, calculá el valor ganado (PV 82.000, EV 80.000, AC 83.500, BAC 130.000) y guardá el corte, actualizá el business case con reales y pronóstico, armá el informe de fin de etapa, el plan de la etapa 3 y el tablero con el recorrido de la socia, y preparame la puerta con las decisiones sobre BMAD que siguen vigentes.</a:t>
+            </a:r>
+            <a:endParaRPr lang="en-US" sz="1550" dirty="0"/>
           </a:p>
         </p:txBody>
       </p:sp>
@@ -23458,12 +23458,12 @@
         </p:nvSpPr>
         <p:spPr>
           <a:xfrm>
-            <a:off x="457200" y="3850386"/>
-            <a:ext cx="11274552" cy="2367534"/>
+            <a:off x="457200" y="3953573"/>
+            <a:ext cx="11274552" cy="2264347"/>
           </a:xfrm>
           <a:prstGeom prst="roundRect">
             <a:avLst>
-              <a:gd name="adj" fmla="val 3862"/>
+              <a:gd name="adj" fmla="val 4038"/>
             </a:avLst>
           </a:prstGeom>
           <a:solidFill>
@@ -23485,7 +23485,7 @@
         </p:nvSpPr>
         <p:spPr>
           <a:xfrm>
-            <a:off x="685800" y="3978402"/>
+            <a:off x="685800" y="4081589"/>
             <a:ext cx="5486400" cy="329184"/>
           </a:xfrm>
           <a:prstGeom prst="rect">
@@ -23524,8 +23524,8 @@
         </p:nvSpPr>
         <p:spPr>
           <a:xfrm>
-            <a:off x="685800" y="4380738"/>
-            <a:ext cx="10817352" cy="1727454"/>
+            <a:off x="685800" y="4483925"/>
+            <a:ext cx="10817352" cy="1624267"/>
           </a:xfrm>
           <a:prstGeom prst="rect">
             <a:avLst/>
@@ -23544,7 +23544,7 @@
               <a:buNone/>
             </a:pPr>
             <a:r>
-              <a:rPr lang="en-US" sz="1600" b="1" dirty="0">
+              <a:rPr lang="en-US" sz="1450" b="1" dirty="0">
                 <a:solidFill>
                   <a:srgbClr val="00629B"/>
                 </a:solidFill>
@@ -23561,7 +23561,7 @@
               <a:buNone/>
             </a:pPr>
             <a:r>
-              <a:rPr lang="en-US" sz="1600" dirty="0">
+              <a:rPr lang="en-US" sz="1450" dirty="0">
                 <a:solidFill>
                   <a:srgbClr val="272425"/>
                 </a:solidFill>
@@ -23581,7 +23581,7 @@
               <a:buNone/>
             </a:pPr>
             <a:r>
-              <a:rPr lang="en-US" sz="1600" b="1" dirty="0">
+              <a:rPr lang="en-US" sz="1450" b="1" dirty="0">
                 <a:solidFill>
                   <a:srgbClr val="00629B"/>
                 </a:solidFill>
@@ -23598,7 +23598,7 @@
               <a:buNone/>
             </a:pPr>
             <a:r>
-              <a:rPr lang="en-US" sz="1600" dirty="0">
+              <a:rPr lang="en-US" sz="1450" dirty="0">
                 <a:solidFill>
                   <a:srgbClr val="272425"/>
                 </a:solidFill>
@@ -23606,7 +23606,7 @@
                 <a:ea typeface="Arial" pitchFamily="34" charset="-122"/>
                 <a:cs typeface="Arial" pitchFamily="34" charset="-120"/>
               </a:rPr>
-              <a:t>E-11: L-003 sin considerar en el plan</a:t>
+              <a:t>E-11: L-003 sin considerar → el plan la incorpora (A-002)</a:t>
             </a:r>
             <a:endParaRPr lang="en-US" sz="1600" dirty="0"/>
           </a:p>
@@ -23618,7 +23618,7 @@
               <a:buNone/>
             </a:pPr>
             <a:r>
-              <a:rPr lang="en-US" sz="1600" b="1" dirty="0">
+              <a:rPr lang="en-US" sz="1450" b="1" dirty="0">
                 <a:solidFill>
                   <a:srgbClr val="00629B"/>
                 </a:solidFill>
@@ -23635,7 +23635,7 @@
               <a:buNone/>
             </a:pPr>
             <a:r>
-              <a:rPr lang="en-US" sz="1600" dirty="0">
+              <a:rPr lang="en-US" sz="1450" dirty="0">
                 <a:solidFill>
                   <a:srgbClr val="272425"/>
                 </a:solidFill>
@@ -23643,7 +23643,7 @@
                 <a:ea typeface="Arial" pitchFamily="34" charset="-122"/>
                 <a:cs typeface="Arial" pitchFamily="34" charset="-120"/>
               </a:rPr>
-              <a:t>Plan de la etapa 3 la incorpora (A-002)</a:t>
+              <a:t>D-018 (PASS) reemplaza a D-012 (CONCERNS)</a:t>
             </a:r>
             <a:endParaRPr lang="en-US" sz="1600" dirty="0"/>
           </a:p>
@@ -23655,7 +23655,7 @@
               <a:buNone/>
             </a:pPr>
             <a:r>
-              <a:rPr lang="en-US" sz="1600" b="1" dirty="0">
+              <a:rPr lang="en-US" sz="1450" b="1" dirty="0">
                 <a:solidFill>
                   <a:srgbClr val="00629B"/>
                 </a:solidFill>
@@ -23672,7 +23672,7 @@
               <a:buNone/>
             </a:pPr>
             <a:r>
-              <a:rPr lang="en-US" sz="1600" dirty="0">
+              <a:rPr lang="en-US" sz="1450" dirty="0">
                 <a:solidFill>
                   <a:srgbClr val="272425"/>
                 </a:solidFill>
@@ -23680,7 +23680,7 @@
                 <a:ea typeface="Arial" pitchFamily="34" charset="-122"/>
                 <a:cs typeface="Arial" pitchFamily="34" charset="-120"/>
               </a:rPr>
-              <a:t>cumplir-condiciones por la ejecutiva</a:t>
+              <a:t>Vigentes sobre BMAD: 16 de 19; D-012 queda en la historia</a:t>
             </a:r>
             <a:endParaRPr lang="en-US" sz="1600" dirty="0"/>
           </a:p>
@@ -23692,7 +23692,7 @@
               <a:buNone/>
             </a:pPr>
             <a:r>
-              <a:rPr lang="en-US" sz="1600" b="1" dirty="0">
+              <a:rPr lang="en-US" sz="1450" b="1" dirty="0">
                 <a:solidFill>
                   <a:srgbClr val="00629B"/>
                 </a:solidFill>
@@ -23709,7 +23709,7 @@
               <a:buNone/>
             </a:pPr>
             <a:r>
-              <a:rPr lang="en-US" sz="1600" dirty="0">
+              <a:rPr lang="en-US" sz="1450" dirty="0">
                 <a:solidFill>
                   <a:srgbClr val="272425"/>
                 </a:solidFill>
@@ -23717,7 +23717,7 @@
                 <a:ea typeface="Arial" pitchFamily="34" charset="-122"/>
                 <a:cs typeface="Arial" pitchFamily="34" charset="-120"/>
               </a:rPr>
-              <a:t>Después: 0 bloqueos · 0 condiciones · 0 avisos</a:t>
+              <a:t>cumplir-condiciones → 0 bloqueos · 0 condiciones · 0 avisos</a:t>
             </a:r>
             <a:endParaRPr lang="en-US" sz="1600" dirty="0"/>
           </a:p>
@@ -24095,7 +24095,7 @@
                 <a:ea typeface="Arial" pitchFamily="34" charset="-122"/>
                 <a:cs typeface="Arial" pitchFamily="34" charset="-120"/>
               </a:rPr>
-              <a:t>22/3: REG-12 en la sanidad y en Vigilar</a:t>
+              <a:t>22/3: REG-12 → L-002 verificada efectiva (Q-009)</a:t>
             </a:r>
             <a:endParaRPr lang="en-US" sz="1600" dirty="0"/>
           </a:p>
@@ -24132,7 +24132,7 @@
                 <a:ea typeface="Arial" pitchFamily="34" charset="-122"/>
                 <a:cs typeface="Arial" pitchFamily="34" charset="-120"/>
               </a:rPr>
-              <a:t>L-002 verificada efectiva (Q-009)</a:t>
+              <a:t>7/5: QUA-01 y QUA-03 por Q-012 → I-002</a:t>
             </a:r>
             <a:endParaRPr lang="en-US" sz="1600" dirty="0"/>
           </a:p>
@@ -24169,7 +24169,7 @@
                 <a:ea typeface="Arial" pitchFamily="34" charset="-122"/>
                 <a:cs typeface="Arial" pitchFamily="34" charset="-120"/>
               </a:rPr>
-              <a:t>7/5: QUA-01 y QUA-03 por Q-012 → I-002 y Q-013</a:t>
+              <a:t>Corregir 81,2 · conceder 63,7: Sofía elige corregir (D-022)</a:t>
             </a:r>
             <a:endParaRPr lang="en-US" sz="1600" dirty="0"/>
           </a:p>
@@ -24206,7 +24206,7 @@
                 <a:ea typeface="Arial" pitchFamily="34" charset="-122"/>
                 <a:cs typeface="Arial" pitchFamily="34" charset="-120"/>
               </a:rPr>
-              <a:t>12/5: L-003 verificada; sanidad 0 AVISO</a:t>
+              <a:t>Q-013; 12/5: L-003 verificada, sanidad 0 AVISO</a:t>
             </a:r>
             <a:endParaRPr lang="en-US" sz="1600" dirty="0"/>
           </a:p>
@@ -24798,7 +24798,7 @@
               <a:buNone/>
             </a:pPr>
             <a:r>
-              <a:rPr lang="en-US" sz="2400" b="1" dirty="0">
+              <a:rPr lang="en-US" sz="2200" b="1" dirty="0">
                 <a:solidFill>
                   <a:srgbClr val="FFFFFF"/>
                 </a:solidFill>
@@ -24806,7 +24806,7 @@
                 <a:ea typeface="Arial" pitchFamily="34" charset="-122"/>
                 <a:cs typeface="Arial" pitchFamily="34" charset="-120"/>
               </a:rPr>
-              <a:t>Paso 9b · El expediente delata una edición</a:t>
+              <a:t>Paso 9b · La huella delata la edición; la bitácora la explica</a:t>
             </a:r>
             <a:endParaRPr lang="en-US" sz="2400" dirty="0"/>
           </a:p>
@@ -24814,7 +24814,7 @@
       </p:sp>
       <p:pic>
         <p:nvPicPr>
-          <p:cNvPr id="3" name="Image 0" descr="Paso 9b · El expediente delata una edición">    </p:cNvPr>
+          <p:cNvPr id="3" name="Image 0" descr="Paso 9b · La huella delata la edición; la bitácora la explica">    </p:cNvPr>
           <p:cNvPicPr>
             <a:picLocks noChangeAspect="1"/>
           </p:cNvPicPr>
@@ -24968,7 +24968,7 @@
                 <a:ea typeface="Arial" pitchFamily="34" charset="-122"/>
                 <a:cs typeface="Arial" pitchFamily="34" charset="-120"/>
               </a:rPr>
-              <a:t>Paso 10 · Primera revisión de beneficios (30/6)</a:t>
+              <a:t>Paso 9c · Qué decía el business case en cada versión</a:t>
             </a:r>
             <a:endParaRPr lang="en-US" sz="2400" dirty="0"/>
           </a:p>
@@ -24976,14 +24976,68 @@
       </p:sp>
       <p:sp>
         <p:nvSpPr>
-          <p:cNvPr id="3" name="Text 1"/>
+          <p:cNvPr id="3" name="Shape 1"/>
+          <p:cNvSpPr/>
+          <p:nvPr/>
+        </p:nvSpPr>
+        <p:spPr>
+          <a:xfrm>
+            <a:off x="457200" y="1280160"/>
+            <a:ext cx="11274552" cy="870509"/>
+          </a:xfrm>
+          <a:prstGeom prst="roundRect">
+            <a:avLst>
+              <a:gd name="adj" fmla="val 10504"/>
+            </a:avLst>
+          </a:prstGeom>
+          <a:solidFill>
+            <a:srgbClr val="E9F1F8"/>
+          </a:solidFill>
+          <a:ln w="12700">
+            <a:solidFill>
+              <a:srgbClr val="E9F1F8"/>
+            </a:solidFill>
+            <a:prstDash val="solid"/>
+          </a:ln>
+        </p:spPr>
+      </p:sp>
+      <p:sp>
+        <p:nvSpPr>
+          <p:cNvPr id="4" name="Shape 2"/>
+          <p:cNvSpPr/>
+          <p:nvPr/>
+        </p:nvSpPr>
+        <p:spPr>
+          <a:xfrm>
+            <a:off x="621792" y="1486814"/>
+            <a:ext cx="457200" cy="457200"/>
+          </a:xfrm>
+          <a:prstGeom prst="roundRect">
+            <a:avLst>
+              <a:gd name="adj" fmla="val 16000"/>
+            </a:avLst>
+          </a:prstGeom>
+          <a:solidFill>
+            <a:srgbClr val="00629B"/>
+          </a:solidFill>
+          <a:ln w="12700">
+            <a:solidFill>
+              <a:srgbClr val="00629B"/>
+            </a:solidFill>
+            <a:prstDash val="solid"/>
+          </a:ln>
+        </p:spPr>
+      </p:sp>
+      <p:sp>
+        <p:nvSpPr>
+          <p:cNvPr id="5" name="Text 3"/>
           <p:cNvSpPr txBox="1"/>
           <p:nvPr/>
         </p:nvSpPr>
         <p:spPr>
           <a:xfrm>
-            <a:off x="457200" y="1280160"/>
-            <a:ext cx="5486400" cy="292608"/>
+            <a:off x="621792" y="1486814"/>
+            <a:ext cx="457200" cy="457200"/>
           </a:xfrm>
           <a:prstGeom prst="rect">
             <a:avLst/>
@@ -24992,107 +25046,80 @@
           <a:ln/>
         </p:spPr>
         <p:txBody>
-          <a:bodyPr wrap="square" lIns="0" tIns="0" rIns="0" bIns="0" rtlCol="0" anchor="t"/>
+          <a:bodyPr wrap="square" lIns="0" tIns="0" rIns="0" bIns="0" rtlCol="0" anchor="ctr"/>
           <a:lstStyle/>
           <a:p>
-            <a:pPr indent="0" marL="0">
-              <a:buNone/>
-            </a:pPr>
-            <a:r>
-              <a:rPr lang="en-US" sz="1300" b="1" dirty="0">
-                <a:solidFill>
-                  <a:srgbClr val="696969"/>
+            <a:pPr algn="ctr" indent="0" marL="0">
+              <a:buNone/>
+            </a:pPr>
+            <a:r>
+              <a:rPr lang="en-US" sz="1600" b="1" dirty="0">
+                <a:solidFill>
+                  <a:srgbClr val="FFFFFF"/>
                 </a:solidFill>
                 <a:latin typeface="Arial" pitchFamily="34" charset="0"/>
                 <a:ea typeface="Arial" pitchFamily="34" charset="-122"/>
                 <a:cs typeface="Arial" pitchFamily="34" charset="-120"/>
               </a:rPr>
-              <a:t>Prompt · escribilo tal cual</a:t>
-            </a:r>
-            <a:endParaRPr lang="en-US" sz="1300" dirty="0"/>
-          </a:p>
-        </p:txBody>
-      </p:sp>
-      <p:sp>
-        <p:nvSpPr>
-          <p:cNvPr id="4" name="Shape 2"/>
+              <a:t>1</a:t>
+            </a:r>
+            <a:endParaRPr lang="en-US" sz="1600" dirty="0"/>
+          </a:p>
+        </p:txBody>
+      </p:sp>
+      <p:sp>
+        <p:nvSpPr>
+          <p:cNvPr id="6" name="Text 4"/>
+          <p:cNvSpPr txBox="1"/>
+          <p:nvPr/>
+        </p:nvSpPr>
+        <p:spPr>
+          <a:xfrm>
+            <a:off x="1280160" y="1335024"/>
+            <a:ext cx="10222992" cy="760781"/>
+          </a:xfrm>
+          <a:prstGeom prst="rect">
+            <a:avLst/>
+          </a:prstGeom>
+          <a:noFill/>
+          <a:ln/>
+        </p:spPr>
+        <p:txBody>
+          <a:bodyPr wrap="square" lIns="0" tIns="0" rIns="0" bIns="0" rtlCol="0" anchor="ctr"/>
+          <a:lstStyle/>
+          <a:p>
+            <a:pPr indent="0" marL="0">
+              <a:buNone/>
+            </a:pPr>
+            <a:r>
+              <a:rPr lang="en-US" sz="2000" dirty="0">
+                <a:solidFill>
+                  <a:srgbClr val="272425"/>
+                </a:solidFill>
+                <a:latin typeface="Arial" pitchFamily="34" charset="0"/>
+                <a:ea typeface="Arial" pitchFamily="34" charset="-122"/>
+                <a:cs typeface="Arial" pitchFamily="34" charset="-120"/>
+              </a:rPr>
+              <a:t>Tres versiones aprobadas por Laura: D-005, D-021 y D-026</a:t>
+            </a:r>
+            <a:endParaRPr lang="en-US" sz="1600" dirty="0"/>
+          </a:p>
+        </p:txBody>
+      </p:sp>
+      <p:sp>
+        <p:nvSpPr>
+          <p:cNvPr id="7" name="Shape 5"/>
           <p:cNvSpPr/>
           <p:nvPr/>
         </p:nvSpPr>
         <p:spPr>
           <a:xfrm>
-            <a:off x="457200" y="1627632"/>
-            <a:ext cx="11274552" cy="1472184"/>
+            <a:off x="457200" y="2296973"/>
+            <a:ext cx="11274552" cy="870509"/>
           </a:xfrm>
           <a:prstGeom prst="roundRect">
             <a:avLst>
-              <a:gd name="adj" fmla="val 4969"/>
-            </a:avLst>
-          </a:prstGeom>
-          <a:solidFill>
-            <a:srgbClr val="0F2238"/>
-          </a:solidFill>
-          <a:ln w="12700">
-            <a:solidFill>
-              <a:srgbClr val="0F2238"/>
-            </a:solidFill>
-            <a:prstDash val="solid"/>
-          </a:ln>
-        </p:spPr>
-      </p:sp>
-      <p:sp>
-        <p:nvSpPr>
-          <p:cNvPr id="5" name="Text 3"/>
-          <p:cNvSpPr txBox="1"/>
-          <p:nvPr/>
-        </p:nvSpPr>
-        <p:spPr>
-          <a:xfrm>
-            <a:off x="685800" y="1792224"/>
-            <a:ext cx="10817352" cy="1143000"/>
-          </a:xfrm>
-          <a:prstGeom prst="rect">
-            <a:avLst/>
-          </a:prstGeom>
-          <a:noFill/>
-          <a:ln/>
-        </p:spPr>
-        <p:txBody>
-          <a:bodyPr wrap="square" lIns="0" tIns="0" rIns="0" bIns="0" rtlCol="0" anchor="ctr"/>
-          <a:lstStyle/>
-          <a:p>
-            <a:pPr indent="0" marL="0">
-              <a:buNone/>
-            </a:pPr>
-            <a:r>
-              <a:rPr lang="en-US" sz="1800" dirty="0">
-                <a:solidFill>
-                  <a:srgbClr val="E8EEF5"/>
-                </a:solidFill>
-                <a:latin typeface="Courier New" pitchFamily="34" charset="0"/>
-                <a:ea typeface="Courier New" pitchFamily="34" charset="-122"/>
-                <a:cs typeface="Courier New" pitchFamily="34" charset="-120"/>
-              </a:rPr>
-              <a:t>Soy Sofía Ramírez, de servicios al socio. Registrá como check-in la línea base al entrar en operación (15/5: KR-1.1 0 %, KR-1.2 5.000 consultas, KR-1.3 96 horas) y la primera revisión al 30/6 (KR-1.1 9 %, KR-1.2 4.600, KR-1.3 70 horas; confianza 6). Puntuá los OKR y decime si vamos en camino.</a:t>
-            </a:r>
-            <a:endParaRPr lang="en-US" sz="1800" dirty="0"/>
-          </a:p>
-        </p:txBody>
-      </p:sp>
-      <p:sp>
-        <p:nvSpPr>
-          <p:cNvPr id="6" name="Shape 4"/>
-          <p:cNvSpPr/>
-          <p:nvPr/>
-        </p:nvSpPr>
-        <p:spPr>
-          <a:xfrm>
-            <a:off x="457200" y="3374136"/>
-            <a:ext cx="11274552" cy="2843784"/>
-          </a:xfrm>
-          <a:prstGeom prst="roundRect">
-            <a:avLst>
-              <a:gd name="adj" fmla="val 3215"/>
+              <a:gd name="adj" fmla="val 10504"/>
             </a:avLst>
           </a:prstGeom>
           <a:solidFill>
@@ -25108,14 +25135,41 @@
       </p:sp>
       <p:sp>
         <p:nvSpPr>
-          <p:cNvPr id="7" name="Text 5"/>
+          <p:cNvPr id="8" name="Shape 6"/>
+          <p:cNvSpPr/>
+          <p:nvPr/>
+        </p:nvSpPr>
+        <p:spPr>
+          <a:xfrm>
+            <a:off x="621792" y="2503627"/>
+            <a:ext cx="457200" cy="457200"/>
+          </a:xfrm>
+          <a:prstGeom prst="roundRect">
+            <a:avLst>
+              <a:gd name="adj" fmla="val 16000"/>
+            </a:avLst>
+          </a:prstGeom>
+          <a:solidFill>
+            <a:srgbClr val="00629B"/>
+          </a:solidFill>
+          <a:ln w="12700">
+            <a:solidFill>
+              <a:srgbClr val="00629B"/>
+            </a:solidFill>
+            <a:prstDash val="solid"/>
+          </a:ln>
+        </p:spPr>
+      </p:sp>
+      <p:sp>
+        <p:nvSpPr>
+          <p:cNvPr id="9" name="Text 7"/>
           <p:cNvSpPr txBox="1"/>
           <p:nvPr/>
         </p:nvSpPr>
         <p:spPr>
           <a:xfrm>
-            <a:off x="685800" y="3502152"/>
-            <a:ext cx="5486400" cy="329184"/>
+            <a:off x="621792" y="2503627"/>
+            <a:ext cx="457200" cy="457200"/>
           </a:xfrm>
           <a:prstGeom prst="rect">
             <a:avLst/>
@@ -25124,22 +25178,22 @@
           <a:ln/>
         </p:spPr>
         <p:txBody>
-          <a:bodyPr wrap="square" lIns="0" tIns="0" rIns="0" bIns="0" rtlCol="0" anchor="t"/>
+          <a:bodyPr wrap="square" lIns="0" tIns="0" rIns="0" bIns="0" rtlCol="0" anchor="ctr"/>
           <a:lstStyle/>
           <a:p>
-            <a:pPr indent="0" marL="0">
+            <a:pPr algn="ctr" indent="0" marL="0">
               <a:buNone/>
             </a:pPr>
             <a:r>
               <a:rPr lang="en-US" sz="1600" b="1" dirty="0">
                 <a:solidFill>
-                  <a:srgbClr val="002855"/>
+                  <a:srgbClr val="FFFFFF"/>
                 </a:solidFill>
                 <a:latin typeface="Arial" pitchFamily="34" charset="0"/>
                 <a:ea typeface="Arial" pitchFamily="34" charset="-122"/>
                 <a:cs typeface="Arial" pitchFamily="34" charset="-120"/>
               </a:rPr>
-              <a:t>Qué deberías ver</a:t>
+              <a:t>2</a:t>
             </a:r>
             <a:endParaRPr lang="en-US" sz="1600" dirty="0"/>
           </a:p>
@@ -25147,14 +25201,14 @@
       </p:sp>
       <p:sp>
         <p:nvSpPr>
-          <p:cNvPr id="8" name="Text 6"/>
+          <p:cNvPr id="10" name="Text 8"/>
           <p:cNvSpPr txBox="1"/>
           <p:nvPr/>
         </p:nvSpPr>
         <p:spPr>
           <a:xfrm>
-            <a:off x="685800" y="3904488"/>
-            <a:ext cx="10817352" cy="2203704"/>
+            <a:off x="1280160" y="2351837"/>
+            <a:ext cx="10222992" cy="760781"/>
           </a:xfrm>
           <a:prstGeom prst="rect">
             <a:avLst/>
@@ -25163,153 +25217,418 @@
           <a:ln/>
         </p:spPr>
         <p:txBody>
-          <a:bodyPr wrap="square" lIns="0" tIns="0" rIns="0" bIns="0" rtlCol="0" anchor="t"/>
+          <a:bodyPr wrap="square" lIns="0" tIns="0" rIns="0" bIns="0" rtlCol="0" anchor="ctr"/>
           <a:lstStyle/>
           <a:p>
             <a:pPr indent="0" marL="0">
-              <a:spcAft>
-                <a:spcPts val="800"/>
-              </a:spcAft>
-              <a:buNone/>
-            </a:pPr>
-            <a:r>
-              <a:rPr lang="en-US" sz="1800" b="1" dirty="0">
-                <a:solidFill>
-                  <a:srgbClr val="00629B"/>
+              <a:buNone/>
+            </a:pPr>
+            <a:r>
+              <a:rPr lang="en-US" sz="2000" dirty="0">
+                <a:solidFill>
+                  <a:srgbClr val="272425"/>
                 </a:solidFill>
                 <a:latin typeface="Arial" pitchFamily="34" charset="0"/>
                 <a:ea typeface="Arial" pitchFamily="34" charset="-122"/>
                 <a:cs typeface="Arial" pitchFamily="34" charset="-120"/>
               </a:rPr>
-              <a:t>✓  </a:t>
-            </a:r>
-            <a:pPr indent="0" marL="0">
-              <a:spcAft>
-                <a:spcPts val="800"/>
-              </a:spcAft>
-              <a:buNone/>
-            </a:pPr>
-            <a:r>
-              <a:rPr lang="en-US" sz="1800" dirty="0">
-                <a:solidFill>
-                  <a:srgbClr val="272425"/>
+              <a:t>De la 1.1 a la 1.2: 1 sección agregada y 1 quitada</a:t>
+            </a:r>
+            <a:endParaRPr lang="en-US" sz="1600" dirty="0"/>
+          </a:p>
+        </p:txBody>
+      </p:sp>
+      <p:sp>
+        <p:nvSpPr>
+          <p:cNvPr id="11" name="Shape 9"/>
+          <p:cNvSpPr/>
+          <p:nvPr/>
+        </p:nvSpPr>
+        <p:spPr>
+          <a:xfrm>
+            <a:off x="457200" y="3313786"/>
+            <a:ext cx="11274552" cy="870509"/>
+          </a:xfrm>
+          <a:prstGeom prst="roundRect">
+            <a:avLst>
+              <a:gd name="adj" fmla="val 10504"/>
+            </a:avLst>
+          </a:prstGeom>
+          <a:solidFill>
+            <a:srgbClr val="E9F1F8"/>
+          </a:solidFill>
+          <a:ln w="12700">
+            <a:solidFill>
+              <a:srgbClr val="E9F1F8"/>
+            </a:solidFill>
+            <a:prstDash val="solid"/>
+          </a:ln>
+        </p:spPr>
+      </p:sp>
+      <p:sp>
+        <p:nvSpPr>
+          <p:cNvPr id="12" name="Shape 10"/>
+          <p:cNvSpPr/>
+          <p:nvPr/>
+        </p:nvSpPr>
+        <p:spPr>
+          <a:xfrm>
+            <a:off x="621792" y="3520440"/>
+            <a:ext cx="457200" cy="457200"/>
+          </a:xfrm>
+          <a:prstGeom prst="roundRect">
+            <a:avLst>
+              <a:gd name="adj" fmla="val 16000"/>
+            </a:avLst>
+          </a:prstGeom>
+          <a:solidFill>
+            <a:srgbClr val="00629B"/>
+          </a:solidFill>
+          <a:ln w="12700">
+            <a:solidFill>
+              <a:srgbClr val="00629B"/>
+            </a:solidFill>
+            <a:prstDash val="solid"/>
+          </a:ln>
+        </p:spPr>
+      </p:sp>
+      <p:sp>
+        <p:nvSpPr>
+          <p:cNvPr id="13" name="Text 11"/>
+          <p:cNvSpPr txBox="1"/>
+          <p:nvPr/>
+        </p:nvSpPr>
+        <p:spPr>
+          <a:xfrm>
+            <a:off x="621792" y="3520440"/>
+            <a:ext cx="457200" cy="457200"/>
+          </a:xfrm>
+          <a:prstGeom prst="rect">
+            <a:avLst/>
+          </a:prstGeom>
+          <a:noFill/>
+          <a:ln/>
+        </p:spPr>
+        <p:txBody>
+          <a:bodyPr wrap="square" lIns="0" tIns="0" rIns="0" bIns="0" rtlCol="0" anchor="ctr"/>
+          <a:lstStyle/>
+          <a:p>
+            <a:pPr algn="ctr" indent="0" marL="0">
+              <a:buNone/>
+            </a:pPr>
+            <a:r>
+              <a:rPr lang="en-US" sz="1600" b="1" dirty="0">
+                <a:solidFill>
+                  <a:srgbClr val="FFFFFF"/>
                 </a:solidFill>
                 <a:latin typeface="Arial" pitchFamily="34" charset="0"/>
                 <a:ea typeface="Arial" pitchFamily="34" charset="-122"/>
                 <a:cs typeface="Arial" pitchFamily="34" charset="-120"/>
               </a:rPr>
-              <a:t>Check-ins: línea base 15/5 y 30/6</a:t>
+              <a:t>3</a:t>
             </a:r>
             <a:endParaRPr lang="en-US" sz="1600" dirty="0"/>
           </a:p>
+        </p:txBody>
+      </p:sp>
+      <p:sp>
+        <p:nvSpPr>
+          <p:cNvPr id="14" name="Text 12"/>
+          <p:cNvSpPr txBox="1"/>
+          <p:nvPr/>
+        </p:nvSpPr>
+        <p:spPr>
+          <a:xfrm>
+            <a:off x="1280160" y="3368650"/>
+            <a:ext cx="10222992" cy="760781"/>
+          </a:xfrm>
+          <a:prstGeom prst="rect">
+            <a:avLst/>
+          </a:prstGeom>
+          <a:noFill/>
+          <a:ln/>
+        </p:spPr>
+        <p:txBody>
+          <a:bodyPr wrap="square" lIns="0" tIns="0" rIns="0" bIns="0" rtlCol="0" anchor="ctr"/>
+          <a:lstStyle/>
           <a:p>
             <a:pPr indent="0" marL="0">
-              <a:spcAft>
-                <a:spcPts val="800"/>
-              </a:spcAft>
-              <a:buNone/>
-            </a:pPr>
-            <a:r>
-              <a:rPr lang="en-US" sz="1800" b="1" dirty="0">
-                <a:solidFill>
-                  <a:srgbClr val="00629B"/>
+              <a:buNone/>
+            </a:pPr>
+            <a:r>
+              <a:rPr lang="en-US" sz="2000" dirty="0">
+                <a:solidFill>
+                  <a:srgbClr val="272425"/>
                 </a:solidFill>
                 <a:latin typeface="Arial" pitchFamily="34" charset="0"/>
                 <a:ea typeface="Arial" pitchFamily="34" charset="-122"/>
                 <a:cs typeface="Arial" pitchFamily="34" charset="-120"/>
               </a:rPr>
-              <a:t>✓  </a:t>
-            </a:r>
-            <a:pPr indent="0" marL="0">
-              <a:spcAft>
-                <a:spcPts val="800"/>
-              </a:spcAft>
-              <a:buNone/>
-            </a:pPr>
-            <a:r>
-              <a:rPr lang="en-US" sz="1800" dirty="0">
-                <a:solidFill>
-                  <a:srgbClr val="272425"/>
+              <a:t>Vigente y aprobada coinciden; con historia aparece la 1.1</a:t>
+            </a:r>
+            <a:endParaRPr lang="en-US" sz="1600" dirty="0"/>
+          </a:p>
+        </p:txBody>
+      </p:sp>
+      <p:sp>
+        <p:nvSpPr>
+          <p:cNvPr id="15" name="Shape 13"/>
+          <p:cNvSpPr/>
+          <p:nvPr/>
+        </p:nvSpPr>
+        <p:spPr>
+          <a:xfrm>
+            <a:off x="457200" y="4330598"/>
+            <a:ext cx="11274552" cy="870509"/>
+          </a:xfrm>
+          <a:prstGeom prst="roundRect">
+            <a:avLst>
+              <a:gd name="adj" fmla="val 10504"/>
+            </a:avLst>
+          </a:prstGeom>
+          <a:solidFill>
+            <a:srgbClr val="F4F6F8"/>
+          </a:solidFill>
+          <a:ln w="12700">
+            <a:solidFill>
+              <a:srgbClr val="F4F6F8"/>
+            </a:solidFill>
+            <a:prstDash val="solid"/>
+          </a:ln>
+        </p:spPr>
+      </p:sp>
+      <p:sp>
+        <p:nvSpPr>
+          <p:cNvPr id="16" name="Shape 14"/>
+          <p:cNvSpPr/>
+          <p:nvPr/>
+        </p:nvSpPr>
+        <p:spPr>
+          <a:xfrm>
+            <a:off x="621792" y="4537253"/>
+            <a:ext cx="457200" cy="457200"/>
+          </a:xfrm>
+          <a:prstGeom prst="roundRect">
+            <a:avLst>
+              <a:gd name="adj" fmla="val 16000"/>
+            </a:avLst>
+          </a:prstGeom>
+          <a:solidFill>
+            <a:srgbClr val="00629B"/>
+          </a:solidFill>
+          <a:ln w="12700">
+            <a:solidFill>
+              <a:srgbClr val="00629B"/>
+            </a:solidFill>
+            <a:prstDash val="solid"/>
+          </a:ln>
+        </p:spPr>
+      </p:sp>
+      <p:sp>
+        <p:nvSpPr>
+          <p:cNvPr id="17" name="Text 15"/>
+          <p:cNvSpPr txBox="1"/>
+          <p:nvPr/>
+        </p:nvSpPr>
+        <p:spPr>
+          <a:xfrm>
+            <a:off x="621792" y="4537253"/>
+            <a:ext cx="457200" cy="457200"/>
+          </a:xfrm>
+          <a:prstGeom prst="rect">
+            <a:avLst/>
+          </a:prstGeom>
+          <a:noFill/>
+          <a:ln/>
+        </p:spPr>
+        <p:txBody>
+          <a:bodyPr wrap="square" lIns="0" tIns="0" rIns="0" bIns="0" rtlCol="0" anchor="ctr"/>
+          <a:lstStyle/>
+          <a:p>
+            <a:pPr algn="ctr" indent="0" marL="0">
+              <a:buNone/>
+            </a:pPr>
+            <a:r>
+              <a:rPr lang="en-US" sz="1600" b="1" dirty="0">
+                <a:solidFill>
+                  <a:srgbClr val="FFFFFF"/>
                 </a:solidFill>
                 <a:latin typeface="Arial" pitchFamily="34" charset="0"/>
                 <a:ea typeface="Arial" pitchFamily="34" charset="-122"/>
                 <a:cs typeface="Arial" pitchFamily="34" charset="-120"/>
               </a:rPr>
-              <a:t>O-1 0,37 en rojo</a:t>
+              <a:t>4</a:t>
             </a:r>
             <a:endParaRPr lang="en-US" sz="1600" dirty="0"/>
           </a:p>
+        </p:txBody>
+      </p:sp>
+      <p:sp>
+        <p:nvSpPr>
+          <p:cNvPr id="18" name="Text 16"/>
+          <p:cNvSpPr txBox="1"/>
+          <p:nvPr/>
+        </p:nvSpPr>
+        <p:spPr>
+          <a:xfrm>
+            <a:off x="1280160" y="4385462"/>
+            <a:ext cx="10222992" cy="760781"/>
+          </a:xfrm>
+          <a:prstGeom prst="rect">
+            <a:avLst/>
+          </a:prstGeom>
+          <a:noFill/>
+          <a:ln/>
+        </p:spPr>
+        <p:txBody>
+          <a:bodyPr wrap="square" lIns="0" tIns="0" rIns="0" bIns="0" rtlCol="0" anchor="ctr"/>
+          <a:lstStyle/>
           <a:p>
             <a:pPr indent="0" marL="0">
-              <a:spcAft>
-                <a:spcPts val="800"/>
-              </a:spcAft>
-              <a:buNone/>
-            </a:pPr>
-            <a:r>
-              <a:rPr lang="en-US" sz="1800" b="1" dirty="0">
-                <a:solidFill>
-                  <a:srgbClr val="00629B"/>
+              <a:buNone/>
+            </a:pPr>
+            <a:r>
+              <a:rPr lang="en-US" sz="2000" dirty="0">
+                <a:solidFill>
+                  <a:srgbClr val="272425"/>
                 </a:solidFill>
                 <a:latin typeface="Arial" pitchFamily="34" charset="0"/>
                 <a:ea typeface="Arial" pitchFamily="34" charset="-122"/>
                 <a:cs typeface="Arial" pitchFamily="34" charset="-120"/>
               </a:rPr>
-              <a:t>✓  </a:t>
-            </a:r>
-            <a:pPr indent="0" marL="0">
-              <a:spcAft>
-                <a:spcPts val="800"/>
-              </a:spcAft>
-              <a:buNone/>
-            </a:pPr>
-            <a:r>
-              <a:rPr lang="en-US" sz="1800" dirty="0">
-                <a:solidFill>
-                  <a:srgbClr val="272425"/>
+              <a:t>D-013 desde la bitácora: una sola escritura (#42)</a:t>
+            </a:r>
+            <a:endParaRPr lang="en-US" sz="1600" dirty="0"/>
+          </a:p>
+        </p:txBody>
+      </p:sp>
+      <p:sp>
+        <p:nvSpPr>
+          <p:cNvPr id="19" name="Shape 17"/>
+          <p:cNvSpPr/>
+          <p:nvPr/>
+        </p:nvSpPr>
+        <p:spPr>
+          <a:xfrm>
+            <a:off x="457200" y="5347411"/>
+            <a:ext cx="11274552" cy="870509"/>
+          </a:xfrm>
+          <a:prstGeom prst="roundRect">
+            <a:avLst>
+              <a:gd name="adj" fmla="val 10504"/>
+            </a:avLst>
+          </a:prstGeom>
+          <a:solidFill>
+            <a:srgbClr val="E9F1F8"/>
+          </a:solidFill>
+          <a:ln w="12700">
+            <a:solidFill>
+              <a:srgbClr val="E9F1F8"/>
+            </a:solidFill>
+            <a:prstDash val="solid"/>
+          </a:ln>
+        </p:spPr>
+      </p:sp>
+      <p:sp>
+        <p:nvSpPr>
+          <p:cNvPr id="20" name="Shape 18"/>
+          <p:cNvSpPr/>
+          <p:nvPr/>
+        </p:nvSpPr>
+        <p:spPr>
+          <a:xfrm>
+            <a:off x="621792" y="5554066"/>
+            <a:ext cx="457200" cy="457200"/>
+          </a:xfrm>
+          <a:prstGeom prst="roundRect">
+            <a:avLst>
+              <a:gd name="adj" fmla="val 16000"/>
+            </a:avLst>
+          </a:prstGeom>
+          <a:solidFill>
+            <a:srgbClr val="00629B"/>
+          </a:solidFill>
+          <a:ln w="12700">
+            <a:solidFill>
+              <a:srgbClr val="00629B"/>
+            </a:solidFill>
+            <a:prstDash val="solid"/>
+          </a:ln>
+        </p:spPr>
+      </p:sp>
+      <p:sp>
+        <p:nvSpPr>
+          <p:cNvPr id="21" name="Text 19"/>
+          <p:cNvSpPr txBox="1"/>
+          <p:nvPr/>
+        </p:nvSpPr>
+        <p:spPr>
+          <a:xfrm>
+            <a:off x="621792" y="5554066"/>
+            <a:ext cx="457200" cy="457200"/>
+          </a:xfrm>
+          <a:prstGeom prst="rect">
+            <a:avLst/>
+          </a:prstGeom>
+          <a:noFill/>
+          <a:ln/>
+        </p:spPr>
+        <p:txBody>
+          <a:bodyPr wrap="square" lIns="0" tIns="0" rIns="0" bIns="0" rtlCol="0" anchor="ctr"/>
+          <a:lstStyle/>
+          <a:p>
+            <a:pPr algn="ctr" indent="0" marL="0">
+              <a:buNone/>
+            </a:pPr>
+            <a:r>
+              <a:rPr lang="en-US" sz="1600" b="1" dirty="0">
+                <a:solidFill>
+                  <a:srgbClr val="FFFFFF"/>
                 </a:solidFill>
                 <a:latin typeface="Arial" pitchFamily="34" charset="0"/>
                 <a:ea typeface="Arial" pitchFamily="34" charset="-122"/>
                 <a:cs typeface="Arial" pitchFamily="34" charset="-120"/>
               </a:rPr>
-              <a:t>Van 46 de 230 días: esperado 0,20</a:t>
+              <a:t>5</a:t>
             </a:r>
             <a:endParaRPr lang="en-US" sz="1600" dirty="0"/>
           </a:p>
+        </p:txBody>
+      </p:sp>
+      <p:sp>
+        <p:nvSpPr>
+          <p:cNvPr id="22" name="Text 20"/>
+          <p:cNvSpPr txBox="1"/>
+          <p:nvPr/>
+        </p:nvSpPr>
+        <p:spPr>
+          <a:xfrm>
+            <a:off x="1280160" y="5402275"/>
+            <a:ext cx="10222992" cy="760781"/>
+          </a:xfrm>
+          <a:prstGeom prst="rect">
+            <a:avLst/>
+          </a:prstGeom>
+          <a:noFill/>
+          <a:ln/>
+        </p:spPr>
+        <p:txBody>
+          <a:bodyPr wrap="square" lIns="0" tIns="0" rIns="0" bIns="0" rtlCol="0" anchor="ctr"/>
+          <a:lstStyle/>
           <a:p>
             <a:pPr indent="0" marL="0">
-              <a:spcAft>
-                <a:spcPts val="800"/>
-              </a:spcAft>
-              <a:buNone/>
-            </a:pPr>
-            <a:r>
-              <a:rPr lang="en-US" sz="1800" b="1" dirty="0">
-                <a:solidFill>
-                  <a:srgbClr val="00629B"/>
+              <a:buNone/>
+            </a:pPr>
+            <a:r>
+              <a:rPr lang="en-US" sz="2000" dirty="0">
+                <a:solidFill>
+                  <a:srgbClr val="272425"/>
                 </a:solidFill>
                 <a:latin typeface="Arial" pitchFamily="34" charset="0"/>
                 <a:ea typeface="Arial" pitchFamily="34" charset="-122"/>
                 <a:cs typeface="Arial" pitchFamily="34" charset="-120"/>
               </a:rPr>
-              <a:t>✓  </a:t>
-            </a:r>
-            <a:pPr indent="0" marL="0">
-              <a:spcAft>
-                <a:spcPts val="800"/>
-              </a:spcAft>
-              <a:buNone/>
-            </a:pPr>
-            <a:r>
-              <a:rPr lang="en-US" sz="1800" dirty="0">
-                <a:solidFill>
-                  <a:srgbClr val="272425"/>
-                </a:solidFill>
-                <a:latin typeface="Arial" pitchFamily="34" charset="0"/>
-                <a:ea typeface="Arial" pitchFamily="34" charset="-122"/>
-                <a:cs typeface="Arial" pitchFamily="34" charset="-120"/>
-              </a:rPr>
-              <a:t>Los tres KR en camino: sin informe</a:t>
+              <a:t>pm-kb solo lee: no escribe en el proyecto ni en la bitácora</a:t>
             </a:r>
             <a:endParaRPr lang="en-US" sz="1600" dirty="0"/>
           </a:p>
@@ -25420,62 +25739,352 @@
                 <a:ea typeface="Arial" pitchFamily="34" charset="-122"/>
                 <a:cs typeface="Arial" pitchFamily="34" charset="-120"/>
               </a:rPr>
-              <a:t>31/12: B-02 adopción queda fuera de la tolerancia</a:t>
+              <a:t>Paso 10 · Primera revisión de beneficios (30/6)</a:t>
             </a:r>
             <a:endParaRPr lang="en-US" sz="2400" dirty="0"/>
           </a:p>
         </p:txBody>
       </p:sp>
-      <p:pic>
-        <p:nvPicPr>
-          <p:cNvPr id="3" name="Image 0" descr="31/12: B-02 adopción queda fuera de la tolerancia">    </p:cNvPr>
-          <p:cNvPicPr>
-            <a:picLocks noChangeAspect="1"/>
-          </p:cNvPicPr>
-          <p:nvPr/>
-        </p:nvPicPr>
-        <p:blipFill>
-          <a:blip r:embed="rId1"/>
-          <a:stretch>
-            <a:fillRect/>
-          </a:stretch>
-        </p:blipFill>
-        <p:spPr>
-          <a:xfrm>
-            <a:off x="1705356" y="1280160"/>
-            <a:ext cx="8778240" cy="4937760"/>
+      <p:sp>
+        <p:nvSpPr>
+          <p:cNvPr id="3" name="Text 1"/>
+          <p:cNvSpPr txBox="1"/>
+          <p:nvPr/>
+        </p:nvSpPr>
+        <p:spPr>
+          <a:xfrm>
+            <a:off x="457200" y="1280160"/>
+            <a:ext cx="5486400" cy="292608"/>
           </a:xfrm>
           <a:prstGeom prst="rect">
             <a:avLst/>
           </a:prstGeom>
-        </p:spPr>
-      </p:pic>
-      <p:sp>
-        <p:nvSpPr>
-          <p:cNvPr id="4" name="Shape 1"/>
+          <a:noFill/>
+          <a:ln/>
+        </p:spPr>
+        <p:txBody>
+          <a:bodyPr wrap="square" lIns="0" tIns="0" rIns="0" bIns="0" rtlCol="0" anchor="t"/>
+          <a:lstStyle/>
+          <a:p>
+            <a:pPr indent="0" marL="0">
+              <a:buNone/>
+            </a:pPr>
+            <a:r>
+              <a:rPr lang="en-US" sz="1300" b="1" dirty="0">
+                <a:solidFill>
+                  <a:srgbClr val="696969"/>
+                </a:solidFill>
+                <a:latin typeface="Arial" pitchFamily="34" charset="0"/>
+                <a:ea typeface="Arial" pitchFamily="34" charset="-122"/>
+                <a:cs typeface="Arial" pitchFamily="34" charset="-120"/>
+              </a:rPr>
+              <a:t>Prompt · escribilo tal cual</a:t>
+            </a:r>
+            <a:endParaRPr lang="en-US" sz="1300" dirty="0"/>
+          </a:p>
+        </p:txBody>
+      </p:sp>
+      <p:sp>
+        <p:nvSpPr>
+          <p:cNvPr id="4" name="Shape 2"/>
           <p:cNvSpPr/>
           <p:nvPr/>
         </p:nvSpPr>
         <p:spPr>
           <a:xfrm>
-            <a:off x="1705356" y="1280160"/>
-            <a:ext cx="8778240" cy="4937760"/>
-          </a:xfrm>
-          <a:prstGeom prst="rect">
-            <a:avLst/>
+            <a:off x="457200" y="1627632"/>
+            <a:ext cx="11274552" cy="1472184"/>
+          </a:xfrm>
+          <a:prstGeom prst="roundRect">
+            <a:avLst>
+              <a:gd name="adj" fmla="val 4969"/>
+            </a:avLst>
           </a:prstGeom>
           <a:solidFill>
-            <a:srgbClr val="FFFFFF">
-              <a:alpha val="0"/>
-            </a:srgbClr>
+            <a:srgbClr val="0F2238"/>
           </a:solidFill>
-          <a:ln w="9525">
+          <a:ln w="12700">
             <a:solidFill>
-              <a:srgbClr val="E2E2E6"/>
+              <a:srgbClr val="0F2238"/>
             </a:solidFill>
             <a:prstDash val="solid"/>
           </a:ln>
         </p:spPr>
+      </p:sp>
+      <p:sp>
+        <p:nvSpPr>
+          <p:cNvPr id="5" name="Text 3"/>
+          <p:cNvSpPr txBox="1"/>
+          <p:nvPr/>
+        </p:nvSpPr>
+        <p:spPr>
+          <a:xfrm>
+            <a:off x="685800" y="1792224"/>
+            <a:ext cx="10817352" cy="1143000"/>
+          </a:xfrm>
+          <a:prstGeom prst="rect">
+            <a:avLst/>
+          </a:prstGeom>
+          <a:noFill/>
+          <a:ln/>
+        </p:spPr>
+        <p:txBody>
+          <a:bodyPr wrap="square" lIns="0" tIns="0" rIns="0" bIns="0" rtlCol="0" anchor="ctr"/>
+          <a:lstStyle/>
+          <a:p>
+            <a:pPr indent="0" marL="0">
+              <a:buNone/>
+            </a:pPr>
+            <a:r>
+              <a:rPr lang="en-US" sz="1800" dirty="0">
+                <a:solidFill>
+                  <a:srgbClr val="E8EEF5"/>
+                </a:solidFill>
+                <a:latin typeface="Courier New" pitchFamily="34" charset="0"/>
+                <a:ea typeface="Courier New" pitchFamily="34" charset="-122"/>
+                <a:cs typeface="Courier New" pitchFamily="34" charset="-120"/>
+              </a:rPr>
+              <a:t>Soy Sofía Ramírez, de servicios al socio. Registrá como check-in la línea base al entrar en operación (15/5: KR-1.1 0 %, KR-1.2 5.000 consultas, KR-1.3 96 horas) y la primera revisión al 30/6 (KR-1.1 9 %, KR-1.2 4.600, KR-1.3 70 horas; confianza 6). Puntuá los OKR y decime si vamos en camino.</a:t>
+            </a:r>
+            <a:endParaRPr lang="en-US" sz="1800" dirty="0"/>
+          </a:p>
+        </p:txBody>
+      </p:sp>
+      <p:sp>
+        <p:nvSpPr>
+          <p:cNvPr id="6" name="Shape 4"/>
+          <p:cNvSpPr/>
+          <p:nvPr/>
+        </p:nvSpPr>
+        <p:spPr>
+          <a:xfrm>
+            <a:off x="457200" y="3374136"/>
+            <a:ext cx="11274552" cy="2843784"/>
+          </a:xfrm>
+          <a:prstGeom prst="roundRect">
+            <a:avLst>
+              <a:gd name="adj" fmla="val 3215"/>
+            </a:avLst>
+          </a:prstGeom>
+          <a:solidFill>
+            <a:srgbClr val="F4F6F8"/>
+          </a:solidFill>
+          <a:ln w="12700">
+            <a:solidFill>
+              <a:srgbClr val="F4F6F8"/>
+            </a:solidFill>
+            <a:prstDash val="solid"/>
+          </a:ln>
+        </p:spPr>
+      </p:sp>
+      <p:sp>
+        <p:nvSpPr>
+          <p:cNvPr id="7" name="Text 5"/>
+          <p:cNvSpPr txBox="1"/>
+          <p:nvPr/>
+        </p:nvSpPr>
+        <p:spPr>
+          <a:xfrm>
+            <a:off x="685800" y="3502152"/>
+            <a:ext cx="5486400" cy="329184"/>
+          </a:xfrm>
+          <a:prstGeom prst="rect">
+            <a:avLst/>
+          </a:prstGeom>
+          <a:noFill/>
+          <a:ln/>
+        </p:spPr>
+        <p:txBody>
+          <a:bodyPr wrap="square" lIns="0" tIns="0" rIns="0" bIns="0" rtlCol="0" anchor="t"/>
+          <a:lstStyle/>
+          <a:p>
+            <a:pPr indent="0" marL="0">
+              <a:buNone/>
+            </a:pPr>
+            <a:r>
+              <a:rPr lang="en-US" sz="1600" b="1" dirty="0">
+                <a:solidFill>
+                  <a:srgbClr val="002855"/>
+                </a:solidFill>
+                <a:latin typeface="Arial" pitchFamily="34" charset="0"/>
+                <a:ea typeface="Arial" pitchFamily="34" charset="-122"/>
+                <a:cs typeface="Arial" pitchFamily="34" charset="-120"/>
+              </a:rPr>
+              <a:t>Qué deberías ver</a:t>
+            </a:r>
+            <a:endParaRPr lang="en-US" sz="1600" dirty="0"/>
+          </a:p>
+        </p:txBody>
+      </p:sp>
+      <p:sp>
+        <p:nvSpPr>
+          <p:cNvPr id="8" name="Text 6"/>
+          <p:cNvSpPr txBox="1"/>
+          <p:nvPr/>
+        </p:nvSpPr>
+        <p:spPr>
+          <a:xfrm>
+            <a:off x="685800" y="3904488"/>
+            <a:ext cx="10817352" cy="2203704"/>
+          </a:xfrm>
+          <a:prstGeom prst="rect">
+            <a:avLst/>
+          </a:prstGeom>
+          <a:noFill/>
+          <a:ln/>
+        </p:spPr>
+        <p:txBody>
+          <a:bodyPr wrap="square" lIns="0" tIns="0" rIns="0" bIns="0" rtlCol="0" anchor="t"/>
+          <a:lstStyle/>
+          <a:p>
+            <a:pPr indent="0" marL="0">
+              <a:spcAft>
+                <a:spcPts val="800"/>
+              </a:spcAft>
+              <a:buNone/>
+            </a:pPr>
+            <a:r>
+              <a:rPr lang="en-US" sz="1800" b="1" dirty="0">
+                <a:solidFill>
+                  <a:srgbClr val="00629B"/>
+                </a:solidFill>
+                <a:latin typeface="Arial" pitchFamily="34" charset="0"/>
+                <a:ea typeface="Arial" pitchFamily="34" charset="-122"/>
+                <a:cs typeface="Arial" pitchFamily="34" charset="-120"/>
+              </a:rPr>
+              <a:t>✓  </a:t>
+            </a:r>
+            <a:pPr indent="0" marL="0">
+              <a:spcAft>
+                <a:spcPts val="800"/>
+              </a:spcAft>
+              <a:buNone/>
+            </a:pPr>
+            <a:r>
+              <a:rPr lang="en-US" sz="1800" dirty="0">
+                <a:solidFill>
+                  <a:srgbClr val="272425"/>
+                </a:solidFill>
+                <a:latin typeface="Arial" pitchFamily="34" charset="0"/>
+                <a:ea typeface="Arial" pitchFamily="34" charset="-122"/>
+                <a:cs typeface="Arial" pitchFamily="34" charset="-120"/>
+              </a:rPr>
+              <a:t>Check-ins: línea base 15/5 y 30/6</a:t>
+            </a:r>
+            <a:endParaRPr lang="en-US" sz="1600" dirty="0"/>
+          </a:p>
+          <a:p>
+            <a:pPr indent="0" marL="0">
+              <a:spcAft>
+                <a:spcPts val="800"/>
+              </a:spcAft>
+              <a:buNone/>
+            </a:pPr>
+            <a:r>
+              <a:rPr lang="en-US" sz="1800" b="1" dirty="0">
+                <a:solidFill>
+                  <a:srgbClr val="00629B"/>
+                </a:solidFill>
+                <a:latin typeface="Arial" pitchFamily="34" charset="0"/>
+                <a:ea typeface="Arial" pitchFamily="34" charset="-122"/>
+                <a:cs typeface="Arial" pitchFamily="34" charset="-120"/>
+              </a:rPr>
+              <a:t>✓  </a:t>
+            </a:r>
+            <a:pPr indent="0" marL="0">
+              <a:spcAft>
+                <a:spcPts val="800"/>
+              </a:spcAft>
+              <a:buNone/>
+            </a:pPr>
+            <a:r>
+              <a:rPr lang="en-US" sz="1800" dirty="0">
+                <a:solidFill>
+                  <a:srgbClr val="272425"/>
+                </a:solidFill>
+                <a:latin typeface="Arial" pitchFamily="34" charset="0"/>
+                <a:ea typeface="Arial" pitchFamily="34" charset="-122"/>
+                <a:cs typeface="Arial" pitchFamily="34" charset="-120"/>
+              </a:rPr>
+              <a:t>O-1 0,37 en rojo</a:t>
+            </a:r>
+            <a:endParaRPr lang="en-US" sz="1600" dirty="0"/>
+          </a:p>
+          <a:p>
+            <a:pPr indent="0" marL="0">
+              <a:spcAft>
+                <a:spcPts val="800"/>
+              </a:spcAft>
+              <a:buNone/>
+            </a:pPr>
+            <a:r>
+              <a:rPr lang="en-US" sz="1800" b="1" dirty="0">
+                <a:solidFill>
+                  <a:srgbClr val="00629B"/>
+                </a:solidFill>
+                <a:latin typeface="Arial" pitchFamily="34" charset="0"/>
+                <a:ea typeface="Arial" pitchFamily="34" charset="-122"/>
+                <a:cs typeface="Arial" pitchFamily="34" charset="-120"/>
+              </a:rPr>
+              <a:t>✓  </a:t>
+            </a:r>
+            <a:pPr indent="0" marL="0">
+              <a:spcAft>
+                <a:spcPts val="800"/>
+              </a:spcAft>
+              <a:buNone/>
+            </a:pPr>
+            <a:r>
+              <a:rPr lang="en-US" sz="1800" dirty="0">
+                <a:solidFill>
+                  <a:srgbClr val="272425"/>
+                </a:solidFill>
+                <a:latin typeface="Arial" pitchFamily="34" charset="0"/>
+                <a:ea typeface="Arial" pitchFamily="34" charset="-122"/>
+                <a:cs typeface="Arial" pitchFamily="34" charset="-120"/>
+              </a:rPr>
+              <a:t>Van 46 de 230 días: esperado 0,20</a:t>
+            </a:r>
+            <a:endParaRPr lang="en-US" sz="1600" dirty="0"/>
+          </a:p>
+          <a:p>
+            <a:pPr indent="0" marL="0">
+              <a:spcAft>
+                <a:spcPts val="800"/>
+              </a:spcAft>
+              <a:buNone/>
+            </a:pPr>
+            <a:r>
+              <a:rPr lang="en-US" sz="1800" b="1" dirty="0">
+                <a:solidFill>
+                  <a:srgbClr val="00629B"/>
+                </a:solidFill>
+                <a:latin typeface="Arial" pitchFamily="34" charset="0"/>
+                <a:ea typeface="Arial" pitchFamily="34" charset="-122"/>
+                <a:cs typeface="Arial" pitchFamily="34" charset="-120"/>
+              </a:rPr>
+              <a:t>✓  </a:t>
+            </a:r>
+            <a:pPr indent="0" marL="0">
+              <a:spcAft>
+                <a:spcPts val="800"/>
+              </a:spcAft>
+              <a:buNone/>
+            </a:pPr>
+            <a:r>
+              <a:rPr lang="en-US" sz="1800" dirty="0">
+                <a:solidFill>
+                  <a:srgbClr val="272425"/>
+                </a:solidFill>
+                <a:latin typeface="Arial" pitchFamily="34" charset="0"/>
+                <a:ea typeface="Arial" pitchFamily="34" charset="-122"/>
+                <a:cs typeface="Arial" pitchFamily="34" charset="-120"/>
+              </a:rPr>
+              <a:t>Los tres KR en camino: sin informe</a:t>
+            </a:r>
+            <a:endParaRPr lang="en-US" sz="1600" dirty="0"/>
+          </a:p>
+        </p:txBody>
       </p:sp>
       <p:sp>
         <p:nvSpPr>
@@ -25711,16 +26320,16 @@
       </p:grpSpPr>
       <p:sp>
         <p:nvSpPr>
-          <p:cNvPr id="2" name="Text 2"/>
+          <p:cNvPr id="2" name="Text 3"/>
           <p:cNvSpPr/>
           <p:nvPr>
-            <p:ph idx="102" type="title" hasCustomPrompt="1"/>
+            <p:ph idx="103" type="title" hasCustomPrompt="1"/>
           </p:nvPr>
         </p:nvSpPr>
         <p:spPr>
           <a:xfrm>
-            <a:off x="548640" y="365760"/>
-            <a:ext cx="9445752" cy="713232"/>
+            <a:off x="658368" y="365760"/>
+            <a:ext cx="9244584" cy="713232"/>
           </a:xfrm>
           <a:prstGeom prst="rect">
             <a:avLst/>
@@ -25736,122 +26345,70 @@
               <a:buNone/>
             </a:pPr>
             <a:r>
-              <a:rPr lang="en-US" sz="2200" b="1" dirty="0">
-                <a:solidFill>
-                  <a:srgbClr val="9FD0F0"/>
+              <a:rPr lang="en-US" sz="2400" b="1" dirty="0">
+                <a:solidFill>
+                  <a:srgbClr val="FFFFFF"/>
                 </a:solidFill>
                 <a:latin typeface="Arial" pitchFamily="34" charset="0"/>
                 <a:ea typeface="Arial" pitchFamily="34" charset="-122"/>
                 <a:cs typeface="Arial" pitchFamily="34" charset="-120"/>
               </a:rPr>
-              <a:t>¿Todo bien?</a:t>
-            </a:r>
-            <a:endParaRPr lang="en-US" sz="2200" dirty="0"/>
-          </a:p>
-        </p:txBody>
-      </p:sp>
-      <p:sp>
-        <p:nvSpPr>
-          <p:cNvPr id="3" name="Shape 1"/>
+              <a:t>31/12: B-02 adopción queda fuera de la tolerancia</a:t>
+            </a:r>
+            <a:endParaRPr lang="en-US" sz="2400" dirty="0"/>
+          </a:p>
+        </p:txBody>
+      </p:sp>
+      <p:pic>
+        <p:nvPicPr>
+          <p:cNvPr id="3" name="Image 0" descr="31/12: B-02 adopción queda fuera de la tolerancia">    </p:cNvPr>
+          <p:cNvPicPr>
+            <a:picLocks noChangeAspect="1"/>
+          </p:cNvPicPr>
+          <p:nvPr/>
+        </p:nvPicPr>
+        <p:blipFill>
+          <a:blip r:embed="rId1"/>
+          <a:stretch>
+            <a:fillRect/>
+          </a:stretch>
+        </p:blipFill>
+        <p:spPr>
+          <a:xfrm>
+            <a:off x="1705356" y="1280160"/>
+            <a:ext cx="8778240" cy="4937760"/>
+          </a:xfrm>
+          <a:prstGeom prst="rect">
+            <a:avLst/>
+          </a:prstGeom>
+        </p:spPr>
+      </p:pic>
+      <p:sp>
+        <p:nvSpPr>
+          <p:cNvPr id="4" name="Shape 1"/>
           <p:cNvSpPr/>
           <p:nvPr/>
         </p:nvSpPr>
         <p:spPr>
           <a:xfrm>
-            <a:off x="548640" y="3131820"/>
-            <a:ext cx="1188720" cy="1188720"/>
-          </a:xfrm>
-          <a:prstGeom prst="ellipse">
+            <a:off x="1705356" y="1280160"/>
+            <a:ext cx="8778240" cy="4937760"/>
+          </a:xfrm>
+          <a:prstGeom prst="rect">
             <a:avLst/>
           </a:prstGeom>
           <a:solidFill>
-            <a:srgbClr val="B5651D"/>
+            <a:srgbClr val="FFFFFF">
+              <a:alpha val="0"/>
+            </a:srgbClr>
           </a:solidFill>
-          <a:ln w="12700">
+          <a:ln w="9525">
             <a:solidFill>
-              <a:srgbClr val="B5651D"/>
+              <a:srgbClr val="E2E2E6"/>
             </a:solidFill>
             <a:prstDash val="solid"/>
           </a:ln>
         </p:spPr>
-      </p:sp>
-      <p:sp>
-        <p:nvSpPr>
-          <p:cNvPr id="4" name="Text 2"/>
-          <p:cNvSpPr txBox="1"/>
-          <p:nvPr/>
-        </p:nvSpPr>
-        <p:spPr>
-          <a:xfrm>
-            <a:off x="548640" y="3131820"/>
-            <a:ext cx="1188720" cy="1188720"/>
-          </a:xfrm>
-          <a:prstGeom prst="rect">
-            <a:avLst/>
-          </a:prstGeom>
-          <a:noFill/>
-          <a:ln/>
-        </p:spPr>
-        <p:txBody>
-          <a:bodyPr wrap="square" lIns="0" tIns="0" rIns="0" bIns="0" rtlCol="0" anchor="ctr"/>
-          <a:lstStyle/>
-          <a:p>
-            <a:pPr algn="ctr" indent="0" marL="0">
-              <a:buNone/>
-            </a:pPr>
-            <a:r>
-              <a:rPr lang="en-US" sz="5400" b="1" dirty="0">
-                <a:solidFill>
-                  <a:srgbClr val="FFFFFF"/>
-                </a:solidFill>
-                <a:latin typeface="Arial" pitchFamily="34" charset="0"/>
-                <a:ea typeface="Arial" pitchFamily="34" charset="-122"/>
-                <a:cs typeface="Arial" pitchFamily="34" charset="-120"/>
-              </a:rPr>
-              <a:t>?</a:t>
-            </a:r>
-            <a:endParaRPr lang="en-US" sz="5400" dirty="0"/>
-          </a:p>
-        </p:txBody>
-      </p:sp>
-      <p:sp>
-        <p:nvSpPr>
-          <p:cNvPr id="5" name="Text 3"/>
-          <p:cNvSpPr txBox="1"/>
-          <p:nvPr/>
-        </p:nvSpPr>
-        <p:spPr>
-          <a:xfrm>
-            <a:off x="2103120" y="1417320"/>
-            <a:ext cx="9537192" cy="4617720"/>
-          </a:xfrm>
-          <a:prstGeom prst="rect">
-            <a:avLst/>
-          </a:prstGeom>
-          <a:noFill/>
-          <a:ln/>
-        </p:spPr>
-        <p:txBody>
-          <a:bodyPr wrap="square" lIns="0" tIns="0" rIns="0" bIns="0" rtlCol="0" anchor="ctr"/>
-          <a:lstStyle/>
-          <a:p>
-            <a:pPr indent="0" marL="0">
-              <a:buNone/>
-            </a:pPr>
-            <a:r>
-              <a:rPr lang="en-US" sz="3200" b="1" dirty="0">
-                <a:solidFill>
-                  <a:srgbClr val="FFFFFF"/>
-                </a:solidFill>
-                <a:latin typeface="Arial" pitchFamily="34" charset="0"/>
-                <a:ea typeface="Arial" pitchFamily="34" charset="-122"/>
-                <a:cs typeface="Arial" pitchFamily="34" charset="-120"/>
-              </a:rPr>
-              <a:t>Al 31/12 el objetivo O-1 sale 0,91 en verde. ¿Está todo bien?</a:t>
-            </a:r>
-            <a:endParaRPr lang="en-US" sz="1600" dirty="0"/>
-          </a:p>
-        </p:txBody>
       </p:sp>
       <p:sp>
         <p:nvSpPr>
@@ -25883,7 +26440,7 @@
             <a:lvl1pPr>
               <a:defRPr sz="1000">
                 <a:solidFill>
-                  <a:srgbClr val="D6E4F0"/>
+                  <a:srgbClr val="696969"/>
                 </a:solidFill>
               </a:defRPr>
             </a:lvl1pPr>
@@ -26486,7 +27043,7 @@
                 <a:ea typeface="Arial" pitchFamily="34" charset="-122"/>
                 <a:cs typeface="Arial" pitchFamily="34" charset="-120"/>
               </a:rPr>
-              <a:t>Evidencia con huella: cada copia se verifica</a:t>
+              <a:t>Huella y bitácora: cada copia se verifica y se explica</a:t>
             </a:r>
             <a:endParaRPr lang="en-US" sz="1600" dirty="0"/>
           </a:p>
@@ -27910,7 +28467,7 @@
                           <a:ea typeface="Arial" pitchFamily="34" charset="-122"/>
                           <a:cs typeface="Arial" pitchFamily="34" charset="-120"/>
                         </a:rPr>
-                        <a:t>Autoridad de cambio (change authority)</a:t>
+                        <a:t>Autoridad de cambio (change authority) y presupuesto de cambio</a:t>
                       </a:r>
                       <a:endParaRPr lang="en-US" sz="1200" dirty="0">
                         <a:latin typeface="Arial" charset="0"/>
@@ -27978,7 +28535,7 @@
                           <a:ea typeface="Arial" pitchFamily="34" charset="-122"/>
                           <a:cs typeface="Arial" pitchFamily="34" charset="-120"/>
                         </a:rPr>
-                        <a:t>Rol con autoridad delegada para aprobar cambios hasta un límite por cambio.</a:t>
+                        <a:t>Rol con autoridad delegada para aprobar cambios hasta un límite por cambio, con cargo al monto que la junta reserva para cambios aprobados (presupuesto de cambio; su consumo lo informa CAM-03).</a:t>
                       </a:r>
                       <a:endParaRPr lang="en-US" sz="1200" dirty="0">
                         <a:latin typeface="Arial" charset="0"/>
@@ -28026,6 +28583,144 @@
                     </a:lnB>
                     <a:solidFill>
                       <a:srgbClr val="F4F6F8"/>
+                    </a:solidFill>
+                  </a:tcPr>
+                </a:tc>
+              </a:tr>
+              <a:tr h="0">
+                <a:tc>
+                  <a:txBody>
+                    <a:bodyPr/>
+                    <a:lstStyle/>
+                    <a:p>
+                      <a:pPr indent="0" marL="0">
+                        <a:buNone/>
+                      </a:pPr>
+                      <a:r>
+                        <a:rPr lang="en-US" sz="1200" b="1" dirty="0">
+                          <a:solidFill>
+                            <a:srgbClr val="002855"/>
+                          </a:solidFill>
+                          <a:latin typeface="Arial" pitchFamily="34" charset="0"/>
+                          <a:ea typeface="Arial" pitchFamily="34" charset="-122"/>
+                          <a:cs typeface="Arial" pitchFamily="34" charset="-120"/>
+                        </a:rPr>
+                        <a:t>Bitácora de escrituras</a:t>
+                      </a:r>
+                      <a:endParaRPr lang="en-US" sz="1200" dirty="0">
+                        <a:latin typeface="Arial" charset="0"/>
+                        <a:ea typeface="Arial" charset="0"/>
+                        <a:cs typeface="Arial" charset="0"/>
+                      </a:endParaRPr>
+                    </a:p>
+                  </a:txBody>
+                  <a:tcPr marL="54864" marR="54864" marT="54864" marB="54864" anchor="t">
+                    <a:lnL w="9525" cap="flat" cmpd="sng" algn="ctr">
+                      <a:solidFill>
+                        <a:srgbClr val="E2E2E6"/>
+                      </a:solidFill>
+                      <a:prstDash val="solid"/>
+                      <a:round/>
+                      <a:headEnd type="none" w="med" len="med"/>
+                      <a:tailEnd type="none" w="med" len="med"/>
+                    </a:lnL>
+                    <a:lnR w="9525" cap="flat" cmpd="sng" algn="ctr">
+                      <a:solidFill>
+                        <a:srgbClr val="E2E2E6"/>
+                      </a:solidFill>
+                      <a:prstDash val="solid"/>
+                      <a:round/>
+                      <a:headEnd type="none" w="med" len="med"/>
+                      <a:tailEnd type="none" w="med" len="med"/>
+                    </a:lnR>
+                    <a:lnT w="9525" cap="flat" cmpd="sng" algn="ctr">
+                      <a:solidFill>
+                        <a:srgbClr val="E2E2E6"/>
+                      </a:solidFill>
+                      <a:prstDash val="solid"/>
+                      <a:round/>
+                      <a:headEnd type="none" w="med" len="med"/>
+                      <a:tailEnd type="none" w="med" len="med"/>
+                    </a:lnT>
+                    <a:lnB w="9525" cap="flat" cmpd="sng" algn="ctr">
+                      <a:solidFill>
+                        <a:srgbClr val="E2E2E6"/>
+                      </a:solidFill>
+                      <a:prstDash val="solid"/>
+                      <a:round/>
+                      <a:headEnd type="none" w="med" len="med"/>
+                      <a:tailEnd type="none" w="med" len="med"/>
+                    </a:lnB>
+                    <a:solidFill>
+                      <a:srgbClr val="FFFFFF"/>
+                    </a:solidFill>
+                  </a:tcPr>
+                </a:tc>
+                <a:tc>
+                  <a:txBody>
+                    <a:bodyPr/>
+                    <a:lstStyle/>
+                    <a:p>
+                      <a:pPr indent="0" marL="0">
+                        <a:buNone/>
+                      </a:pPr>
+                      <a:r>
+                        <a:rPr lang="en-US" sz="1200" dirty="0">
+                          <a:solidFill>
+                            <a:srgbClr val="272425"/>
+                          </a:solidFill>
+                          <a:latin typeface="Arial" pitchFamily="34" charset="0"/>
+                          <a:ea typeface="Arial" pitchFamily="34" charset="-122"/>
+                          <a:cs typeface="Arial" pitchFamily="34" charset="-120"/>
+                        </a:rPr>
+                        <a:t>Archivo .bitacora.jsonl que anotan los scripts en cada escritura de estado.json, registros y propuestas: fecha real, script, ids, --por y huellas encadenadas; registro.py historial la consulta.</a:t>
+                      </a:r>
+                      <a:endParaRPr lang="en-US" sz="1200" dirty="0">
+                        <a:latin typeface="Arial" charset="0"/>
+                        <a:ea typeface="Arial" charset="0"/>
+                        <a:cs typeface="Arial" charset="0"/>
+                      </a:endParaRPr>
+                    </a:p>
+                  </a:txBody>
+                  <a:tcPr marL="54864" marR="54864" marT="54864" marB="54864" anchor="t">
+                    <a:lnL w="9525" cap="flat" cmpd="sng" algn="ctr">
+                      <a:solidFill>
+                        <a:srgbClr val="E2E2E6"/>
+                      </a:solidFill>
+                      <a:prstDash val="solid"/>
+                      <a:round/>
+                      <a:headEnd type="none" w="med" len="med"/>
+                      <a:tailEnd type="none" w="med" len="med"/>
+                    </a:lnL>
+                    <a:lnR w="9525" cap="flat" cmpd="sng" algn="ctr">
+                      <a:solidFill>
+                        <a:srgbClr val="E2E2E6"/>
+                      </a:solidFill>
+                      <a:prstDash val="solid"/>
+                      <a:round/>
+                      <a:headEnd type="none" w="med" len="med"/>
+                      <a:tailEnd type="none" w="med" len="med"/>
+                    </a:lnR>
+                    <a:lnT w="9525" cap="flat" cmpd="sng" algn="ctr">
+                      <a:solidFill>
+                        <a:srgbClr val="E2E2E6"/>
+                      </a:solidFill>
+                      <a:prstDash val="solid"/>
+                      <a:round/>
+                      <a:headEnd type="none" w="med" len="med"/>
+                      <a:tailEnd type="none" w="med" len="med"/>
+                    </a:lnT>
+                    <a:lnB w="9525" cap="flat" cmpd="sng" algn="ctr">
+                      <a:solidFill>
+                        <a:srgbClr val="E2E2E6"/>
+                      </a:solidFill>
+                      <a:prstDash val="solid"/>
+                      <a:round/>
+                      <a:headEnd type="none" w="med" len="med"/>
+                      <a:tailEnd type="none" w="med" len="med"/>
+                    </a:lnB>
+                    <a:solidFill>
+                      <a:srgbClr val="FFFFFF"/>
                     </a:solidFill>
                   </a:tcPr>
                 </a:tc>
@@ -28095,7 +28790,7 @@
                       <a:tailEnd type="none" w="med" len="med"/>
                     </a:lnB>
                     <a:solidFill>
-                      <a:srgbClr val="FFFFFF"/>
+                      <a:srgbClr val="F4F6F8"/>
                     </a:solidFill>
                   </a:tcPr>
                 </a:tc>
@@ -28163,7 +28858,7 @@
                       <a:tailEnd type="none" w="med" len="med"/>
                     </a:lnB>
                     <a:solidFill>
-                      <a:srgbClr val="FFFFFF"/>
+                      <a:srgbClr val="F4F6F8"/>
                     </a:solidFill>
                   </a:tcPr>
                 </a:tc>
@@ -28233,7 +28928,7 @@
                       <a:tailEnd type="none" w="med" len="med"/>
                     </a:lnB>
                     <a:solidFill>
-                      <a:srgbClr val="F4F6F8"/>
+                      <a:srgbClr val="FFFFFF"/>
                     </a:solidFill>
                   </a:tcPr>
                 </a:tc>
@@ -28301,283 +28996,7 @@
                       <a:tailEnd type="none" w="med" len="med"/>
                     </a:lnB>
                     <a:solidFill>
-                      <a:srgbClr val="F4F6F8"/>
-                    </a:solidFill>
-                  </a:tcPr>
-                </a:tc>
-              </a:tr>
-              <a:tr h="0">
-                <a:tc>
-                  <a:txBody>
-                    <a:bodyPr/>
-                    <a:lstStyle/>
-                    <a:p>
-                      <a:pPr indent="0" marL="0">
-                        <a:buNone/>
-                      </a:pPr>
-                      <a:r>
-                        <a:rPr lang="en-US" sz="1200" b="1" dirty="0">
-                          <a:solidFill>
-                            <a:srgbClr val="002855"/>
-                          </a:solidFill>
-                          <a:latin typeface="Arial" pitchFamily="34" charset="0"/>
-                          <a:ea typeface="Arial" pitchFamily="34" charset="-122"/>
-                          <a:cs typeface="Arial" pitchFamily="34" charset="-120"/>
-                        </a:rPr>
-                        <a:t>Enfoque de beneficios</a:t>
-                      </a:r>
-                      <a:endParaRPr lang="en-US" sz="1200" dirty="0">
-                        <a:latin typeface="Arial" charset="0"/>
-                        <a:ea typeface="Arial" charset="0"/>
-                        <a:cs typeface="Arial" charset="0"/>
-                      </a:endParaRPr>
-                    </a:p>
-                  </a:txBody>
-                  <a:tcPr marL="54864" marR="54864" marT="54864" marB="54864" anchor="t">
-                    <a:lnL w="9525" cap="flat" cmpd="sng" algn="ctr">
-                      <a:solidFill>
-                        <a:srgbClr val="E2E2E6"/>
-                      </a:solidFill>
-                      <a:prstDash val="solid"/>
-                      <a:round/>
-                      <a:headEnd type="none" w="med" len="med"/>
-                      <a:tailEnd type="none" w="med" len="med"/>
-                    </a:lnL>
-                    <a:lnR w="9525" cap="flat" cmpd="sng" algn="ctr">
-                      <a:solidFill>
-                        <a:srgbClr val="E2E2E6"/>
-                      </a:solidFill>
-                      <a:prstDash val="solid"/>
-                      <a:round/>
-                      <a:headEnd type="none" w="med" len="med"/>
-                      <a:tailEnd type="none" w="med" len="med"/>
-                    </a:lnR>
-                    <a:lnT w="9525" cap="flat" cmpd="sng" algn="ctr">
-                      <a:solidFill>
-                        <a:srgbClr val="E2E2E6"/>
-                      </a:solidFill>
-                      <a:prstDash val="solid"/>
-                      <a:round/>
-                      <a:headEnd type="none" w="med" len="med"/>
-                      <a:tailEnd type="none" w="med" len="med"/>
-                    </a:lnT>
-                    <a:lnB w="9525" cap="flat" cmpd="sng" algn="ctr">
-                      <a:solidFill>
-                        <a:srgbClr val="E2E2E6"/>
-                      </a:solidFill>
-                      <a:prstDash val="solid"/>
-                      <a:round/>
-                      <a:headEnd type="none" w="med" len="med"/>
-                      <a:tailEnd type="none" w="med" len="med"/>
-                    </a:lnB>
-                    <a:solidFill>
                       <a:srgbClr val="FFFFFF"/>
-                    </a:solidFill>
-                  </a:tcPr>
-                </a:tc>
-                <a:tc>
-                  <a:txBody>
-                    <a:bodyPr/>
-                    <a:lstStyle/>
-                    <a:p>
-                      <a:pPr indent="0" marL="0">
-                        <a:buNone/>
-                      </a:pPr>
-                      <a:r>
-                        <a:rPr lang="en-US" sz="1200" dirty="0">
-                          <a:solidFill>
-                            <a:srgbClr val="272425"/>
-                          </a:solidFill>
-                          <a:latin typeface="Arial" pitchFamily="34" charset="0"/>
-                          <a:ea typeface="Arial" pitchFamily="34" charset="-122"/>
-                          <a:cs typeface="Arial" pitchFamily="34" charset="-120"/>
-                        </a:rPr>
-                        <a:t>Cómo, cuándo y quién mide cada beneficio, incluso después del proyecto; lo exige P-04.</a:t>
-                      </a:r>
-                      <a:endParaRPr lang="en-US" sz="1200" dirty="0">
-                        <a:latin typeface="Arial" charset="0"/>
-                        <a:ea typeface="Arial" charset="0"/>
-                        <a:cs typeface="Arial" charset="0"/>
-                      </a:endParaRPr>
-                    </a:p>
-                  </a:txBody>
-                  <a:tcPr marL="54864" marR="54864" marT="54864" marB="54864" anchor="t">
-                    <a:lnL w="9525" cap="flat" cmpd="sng" algn="ctr">
-                      <a:solidFill>
-                        <a:srgbClr val="E2E2E6"/>
-                      </a:solidFill>
-                      <a:prstDash val="solid"/>
-                      <a:round/>
-                      <a:headEnd type="none" w="med" len="med"/>
-                      <a:tailEnd type="none" w="med" len="med"/>
-                    </a:lnL>
-                    <a:lnR w="9525" cap="flat" cmpd="sng" algn="ctr">
-                      <a:solidFill>
-                        <a:srgbClr val="E2E2E6"/>
-                      </a:solidFill>
-                      <a:prstDash val="solid"/>
-                      <a:round/>
-                      <a:headEnd type="none" w="med" len="med"/>
-                      <a:tailEnd type="none" w="med" len="med"/>
-                    </a:lnR>
-                    <a:lnT w="9525" cap="flat" cmpd="sng" algn="ctr">
-                      <a:solidFill>
-                        <a:srgbClr val="E2E2E6"/>
-                      </a:solidFill>
-                      <a:prstDash val="solid"/>
-                      <a:round/>
-                      <a:headEnd type="none" w="med" len="med"/>
-                      <a:tailEnd type="none" w="med" len="med"/>
-                    </a:lnT>
-                    <a:lnB w="9525" cap="flat" cmpd="sng" algn="ctr">
-                      <a:solidFill>
-                        <a:srgbClr val="E2E2E6"/>
-                      </a:solidFill>
-                      <a:prstDash val="solid"/>
-                      <a:round/>
-                      <a:headEnd type="none" w="med" len="med"/>
-                      <a:tailEnd type="none" w="med" len="med"/>
-                    </a:lnB>
-                    <a:solidFill>
-                      <a:srgbClr val="FFFFFF"/>
-                    </a:solidFill>
-                  </a:tcPr>
-                </a:tc>
-              </a:tr>
-              <a:tr h="0">
-                <a:tc>
-                  <a:txBody>
-                    <a:bodyPr/>
-                    <a:lstStyle/>
-                    <a:p>
-                      <a:pPr indent="0" marL="0">
-                        <a:buNone/>
-                      </a:pPr>
-                      <a:r>
-                        <a:rPr lang="en-US" sz="1200" b="1" dirty="0">
-                          <a:solidFill>
-                            <a:srgbClr val="002855"/>
-                          </a:solidFill>
-                          <a:latin typeface="Arial" pitchFamily="34" charset="0"/>
-                          <a:ea typeface="Arial" pitchFamily="34" charset="-122"/>
-                          <a:cs typeface="Arial" pitchFamily="34" charset="-120"/>
-                        </a:rPr>
-                        <a:t>Expediente de auditoría (audit pack)</a:t>
-                      </a:r>
-                      <a:endParaRPr lang="en-US" sz="1200" dirty="0">
-                        <a:latin typeface="Arial" charset="0"/>
-                        <a:ea typeface="Arial" charset="0"/>
-                        <a:cs typeface="Arial" charset="0"/>
-                      </a:endParaRPr>
-                    </a:p>
-                  </a:txBody>
-                  <a:tcPr marL="54864" marR="54864" marT="54864" marB="54864" anchor="t">
-                    <a:lnL w="9525" cap="flat" cmpd="sng" algn="ctr">
-                      <a:solidFill>
-                        <a:srgbClr val="E2E2E6"/>
-                      </a:solidFill>
-                      <a:prstDash val="solid"/>
-                      <a:round/>
-                      <a:headEnd type="none" w="med" len="med"/>
-                      <a:tailEnd type="none" w="med" len="med"/>
-                    </a:lnL>
-                    <a:lnR w="9525" cap="flat" cmpd="sng" algn="ctr">
-                      <a:solidFill>
-                        <a:srgbClr val="E2E2E6"/>
-                      </a:solidFill>
-                      <a:prstDash val="solid"/>
-                      <a:round/>
-                      <a:headEnd type="none" w="med" len="med"/>
-                      <a:tailEnd type="none" w="med" len="med"/>
-                    </a:lnR>
-                    <a:lnT w="9525" cap="flat" cmpd="sng" algn="ctr">
-                      <a:solidFill>
-                        <a:srgbClr val="E2E2E6"/>
-                      </a:solidFill>
-                      <a:prstDash val="solid"/>
-                      <a:round/>
-                      <a:headEnd type="none" w="med" len="med"/>
-                      <a:tailEnd type="none" w="med" len="med"/>
-                    </a:lnT>
-                    <a:lnB w="9525" cap="flat" cmpd="sng" algn="ctr">
-                      <a:solidFill>
-                        <a:srgbClr val="E2E2E6"/>
-                      </a:solidFill>
-                      <a:prstDash val="solid"/>
-                      <a:round/>
-                      <a:headEnd type="none" w="med" len="med"/>
-                      <a:tailEnd type="none" w="med" len="med"/>
-                    </a:lnB>
-                    <a:solidFill>
-                      <a:srgbClr val="F4F6F8"/>
-                    </a:solidFill>
-                  </a:tcPr>
-                </a:tc>
-                <a:tc>
-                  <a:txBody>
-                    <a:bodyPr/>
-                    <a:lstStyle/>
-                    <a:p>
-                      <a:pPr indent="0" marL="0">
-                        <a:buNone/>
-                      </a:pPr>
-                      <a:r>
-                        <a:rPr lang="en-US" sz="1200" dirty="0">
-                          <a:solidFill>
-                            <a:srgbClr val="272425"/>
-                          </a:solidFill>
-                          <a:latin typeface="Arial" pitchFamily="34" charset="0"/>
-                          <a:ea typeface="Arial" pitchFamily="34" charset="-122"/>
-                          <a:cs typeface="Arial" pitchFamily="34" charset="-120"/>
-                        </a:rPr>
-                        <a:t>ZIP que arma paquete.py auditoria desde los registros: cronología de puertas, decisiones y cambios, copias congeladas, registros y un sha256 por archivo; paquete.py verificar delata cualquier edición.</a:t>
-                      </a:r>
-                      <a:endParaRPr lang="en-US" sz="1200" dirty="0">
-                        <a:latin typeface="Arial" charset="0"/>
-                        <a:ea typeface="Arial" charset="0"/>
-                        <a:cs typeface="Arial" charset="0"/>
-                      </a:endParaRPr>
-                    </a:p>
-                  </a:txBody>
-                  <a:tcPr marL="54864" marR="54864" marT="54864" marB="54864" anchor="t">
-                    <a:lnL w="9525" cap="flat" cmpd="sng" algn="ctr">
-                      <a:solidFill>
-                        <a:srgbClr val="E2E2E6"/>
-                      </a:solidFill>
-                      <a:prstDash val="solid"/>
-                      <a:round/>
-                      <a:headEnd type="none" w="med" len="med"/>
-                      <a:tailEnd type="none" w="med" len="med"/>
-                    </a:lnL>
-                    <a:lnR w="9525" cap="flat" cmpd="sng" algn="ctr">
-                      <a:solidFill>
-                        <a:srgbClr val="E2E2E6"/>
-                      </a:solidFill>
-                      <a:prstDash val="solid"/>
-                      <a:round/>
-                      <a:headEnd type="none" w="med" len="med"/>
-                      <a:tailEnd type="none" w="med" len="med"/>
-                    </a:lnR>
-                    <a:lnT w="9525" cap="flat" cmpd="sng" algn="ctr">
-                      <a:solidFill>
-                        <a:srgbClr val="E2E2E6"/>
-                      </a:solidFill>
-                      <a:prstDash val="solid"/>
-                      <a:round/>
-                      <a:headEnd type="none" w="med" len="med"/>
-                      <a:tailEnd type="none" w="med" len="med"/>
-                    </a:lnT>
-                    <a:lnB w="9525" cap="flat" cmpd="sng" algn="ctr">
-                      <a:solidFill>
-                        <a:srgbClr val="E2E2E6"/>
-                      </a:solidFill>
-                      <a:prstDash val="solid"/>
-                      <a:round/>
-                      <a:headEnd type="none" w="med" len="med"/>
-                      <a:tailEnd type="none" w="med" len="med"/>
-                    </a:lnB>
-                    <a:solidFill>
-                      <a:srgbClr val="F4F6F8"/>
                     </a:solidFill>
                   </a:tcPr>
                 </a:tc>
@@ -28768,7 +29187,7 @@
                           <a:ea typeface="Arial" pitchFamily="34" charset="-122"/>
                           <a:cs typeface="Arial" pitchFamily="34" charset="-120"/>
                         </a:rPr>
-                        <a:t>Fachada de especificación</a:t>
+                        <a:t>Decisión vigente</a:t>
                       </a:r>
                       <a:endParaRPr lang="en-US" sz="1200" dirty="0">
                         <a:latin typeface="Arial" charset="0"/>
@@ -28836,7 +29255,7 @@
                           <a:ea typeface="Arial" pitchFamily="34" charset="-122"/>
                           <a:cs typeface="Arial" pitchFamily="34" charset="-120"/>
                         </a:rPr>
-                        <a:t>Lectura de BMAD que hace pm-method (bmad.py, especificacion.py) sin copiar ni modificar los artefactos.</a:t>
+                        <a:t>Decisión que ninguna posterior reemplaza (columna reemplaza de decisiones.csv, nivel igual o superior); decision.py vigentes las lista con su cadena (D-012 → D-018).</a:t>
                       </a:r>
                       <a:endParaRPr lang="en-US" sz="1200" dirty="0">
                         <a:latin typeface="Arial" charset="0"/>
@@ -28906,7 +29325,7 @@
                           <a:ea typeface="Arial" pitchFamily="34" charset="-122"/>
                           <a:cs typeface="Arial" pitchFamily="34" charset="-120"/>
                         </a:rPr>
-                        <a:t>Fuera de especificación (off-specification)</a:t>
+                        <a:t>Enfoque de beneficios</a:t>
                       </a:r>
                       <a:endParaRPr lang="en-US" sz="1200" dirty="0">
                         <a:latin typeface="Arial" charset="0"/>
@@ -28974,7 +29393,7 @@
                           <a:ea typeface="Arial" pitchFamily="34" charset="-122"/>
                           <a:cs typeface="Arial" pitchFamily="34" charset="-120"/>
                         </a:rPr>
-                        <a:t>Producto que no cumple su especificación; se trata como issue.</a:t>
+                        <a:t>Cómo, cuándo y quién mide cada beneficio, incluso después del proyecto; lo exige P-04.</a:t>
                       </a:r>
                       <a:endParaRPr lang="en-US" sz="1200" dirty="0">
                         <a:latin typeface="Arial" charset="0"/>
@@ -29044,7 +29463,7 @@
                           <a:ea typeface="Arial" pitchFamily="34" charset="-122"/>
                           <a:cs typeface="Arial" pitchFamily="34" charset="-120"/>
                         </a:rPr>
-                        <a:t>Gate de preparación</a:t>
+                        <a:t>Expediente de auditoría (audit pack)</a:t>
                       </a:r>
                       <a:endParaRPr lang="en-US" sz="1200" dirty="0">
                         <a:latin typeface="Arial" charset="0"/>
@@ -29112,7 +29531,7 @@
                           <a:ea typeface="Arial" pitchFamily="34" charset="-122"/>
                           <a:cs typeface="Arial" pitchFamily="34" charset="-120"/>
                         </a:rPr>
-                        <a:t>Revisión de BMAD antes de construir (implementation readiness): PASS, CONCERNS o FAIL.</a:t>
+                        <a:t>ZIP que arma paquete.py auditoria desde los registros: cronología de puertas, decisiones y cambios, copias congeladas, registros y un sha256 por archivo; paquete.py verificar delata cualquier edición.</a:t>
                       </a:r>
                       <a:endParaRPr lang="en-US" sz="1200" dirty="0">
                         <a:latin typeface="Arial" charset="0"/>
@@ -29182,7 +29601,7 @@
                           <a:ea typeface="Arial" pitchFamily="34" charset="-122"/>
                           <a:cs typeface="Arial" pitchFamily="34" charset="-120"/>
                         </a:rPr>
-                        <a:t>Informe de punto de control (checkpoint report)</a:t>
+                        <a:t>Fachada de especificación</a:t>
                       </a:r>
                       <a:endParaRPr lang="en-US" sz="1200" dirty="0">
                         <a:latin typeface="Arial" charset="0"/>
@@ -29250,7 +29669,7 @@
                           <a:ea typeface="Arial" pitchFamily="34" charset="-122"/>
                           <a:cs typeface="Arial" pitchFamily="34" charset="-120"/>
                         </a:rPr>
-                        <a:t>Informe del equipo sobre un paquete; solo cuenta como completados los productos con revisión aprobada.</a:t>
+                        <a:t>Lectura de BMAD que hace pm-method (bmad.py, especificacion.py) sin copiar ni modificar los artefactos.</a:t>
                       </a:r>
                       <a:endParaRPr lang="en-US" sz="1200" dirty="0">
                         <a:latin typeface="Arial" charset="0"/>
@@ -29599,6 +30018,282 @@
                           <a:ea typeface="Arial" pitchFamily="34" charset="-122"/>
                           <a:cs typeface="Arial" pitchFamily="34" charset="-120"/>
                         </a:rPr>
+                        <a:t>Fuera de especificación (off-specification)</a:t>
+                      </a:r>
+                      <a:endParaRPr lang="en-US" sz="1200" dirty="0">
+                        <a:latin typeface="Arial" charset="0"/>
+                        <a:ea typeface="Arial" charset="0"/>
+                        <a:cs typeface="Arial" charset="0"/>
+                      </a:endParaRPr>
+                    </a:p>
+                  </a:txBody>
+                  <a:tcPr marL="54864" marR="54864" marT="54864" marB="54864" anchor="t">
+                    <a:lnL w="9525" cap="flat" cmpd="sng" algn="ctr">
+                      <a:solidFill>
+                        <a:srgbClr val="E2E2E6"/>
+                      </a:solidFill>
+                      <a:prstDash val="solid"/>
+                      <a:round/>
+                      <a:headEnd type="none" w="med" len="med"/>
+                      <a:tailEnd type="none" w="med" len="med"/>
+                    </a:lnL>
+                    <a:lnR w="9525" cap="flat" cmpd="sng" algn="ctr">
+                      <a:solidFill>
+                        <a:srgbClr val="E2E2E6"/>
+                      </a:solidFill>
+                      <a:prstDash val="solid"/>
+                      <a:round/>
+                      <a:headEnd type="none" w="med" len="med"/>
+                      <a:tailEnd type="none" w="med" len="med"/>
+                    </a:lnR>
+                    <a:lnT w="9525" cap="flat" cmpd="sng" algn="ctr">
+                      <a:solidFill>
+                        <a:srgbClr val="E2E2E6"/>
+                      </a:solidFill>
+                      <a:prstDash val="solid"/>
+                      <a:round/>
+                      <a:headEnd type="none" w="med" len="med"/>
+                      <a:tailEnd type="none" w="med" len="med"/>
+                    </a:lnT>
+                    <a:lnB w="9525" cap="flat" cmpd="sng" algn="ctr">
+                      <a:solidFill>
+                        <a:srgbClr val="E2E2E6"/>
+                      </a:solidFill>
+                      <a:prstDash val="solid"/>
+                      <a:round/>
+                      <a:headEnd type="none" w="med" len="med"/>
+                      <a:tailEnd type="none" w="med" len="med"/>
+                    </a:lnB>
+                    <a:solidFill>
+                      <a:srgbClr val="F4F6F8"/>
+                    </a:solidFill>
+                  </a:tcPr>
+                </a:tc>
+                <a:tc>
+                  <a:txBody>
+                    <a:bodyPr/>
+                    <a:lstStyle/>
+                    <a:p>
+                      <a:pPr indent="0" marL="0">
+                        <a:buNone/>
+                      </a:pPr>
+                      <a:r>
+                        <a:rPr lang="en-US" sz="1200" dirty="0">
+                          <a:solidFill>
+                            <a:srgbClr val="272425"/>
+                          </a:solidFill>
+                          <a:latin typeface="Arial" pitchFamily="34" charset="0"/>
+                          <a:ea typeface="Arial" pitchFamily="34" charset="-122"/>
+                          <a:cs typeface="Arial" pitchFamily="34" charset="-120"/>
+                        </a:rPr>
+                        <a:t>Producto que no cumple su especificación; se trata como issue y se corrige o se concede (concesión: aceptarlo como está), según elija la autoridad de cambio; en el caso, corregir (D-022).</a:t>
+                      </a:r>
+                      <a:endParaRPr lang="en-US" sz="1200" dirty="0">
+                        <a:latin typeface="Arial" charset="0"/>
+                        <a:ea typeface="Arial" charset="0"/>
+                        <a:cs typeface="Arial" charset="0"/>
+                      </a:endParaRPr>
+                    </a:p>
+                  </a:txBody>
+                  <a:tcPr marL="54864" marR="54864" marT="54864" marB="54864" anchor="t">
+                    <a:lnL w="9525" cap="flat" cmpd="sng" algn="ctr">
+                      <a:solidFill>
+                        <a:srgbClr val="E2E2E6"/>
+                      </a:solidFill>
+                      <a:prstDash val="solid"/>
+                      <a:round/>
+                      <a:headEnd type="none" w="med" len="med"/>
+                      <a:tailEnd type="none" w="med" len="med"/>
+                    </a:lnL>
+                    <a:lnR w="9525" cap="flat" cmpd="sng" algn="ctr">
+                      <a:solidFill>
+                        <a:srgbClr val="E2E2E6"/>
+                      </a:solidFill>
+                      <a:prstDash val="solid"/>
+                      <a:round/>
+                      <a:headEnd type="none" w="med" len="med"/>
+                      <a:tailEnd type="none" w="med" len="med"/>
+                    </a:lnR>
+                    <a:lnT w="9525" cap="flat" cmpd="sng" algn="ctr">
+                      <a:solidFill>
+                        <a:srgbClr val="E2E2E6"/>
+                      </a:solidFill>
+                      <a:prstDash val="solid"/>
+                      <a:round/>
+                      <a:headEnd type="none" w="med" len="med"/>
+                      <a:tailEnd type="none" w="med" len="med"/>
+                    </a:lnT>
+                    <a:lnB w="9525" cap="flat" cmpd="sng" algn="ctr">
+                      <a:solidFill>
+                        <a:srgbClr val="E2E2E6"/>
+                      </a:solidFill>
+                      <a:prstDash val="solid"/>
+                      <a:round/>
+                      <a:headEnd type="none" w="med" len="med"/>
+                      <a:tailEnd type="none" w="med" len="med"/>
+                    </a:lnB>
+                    <a:solidFill>
+                      <a:srgbClr val="F4F6F8"/>
+                    </a:solidFill>
+                  </a:tcPr>
+                </a:tc>
+              </a:tr>
+              <a:tr h="0">
+                <a:tc>
+                  <a:txBody>
+                    <a:bodyPr/>
+                    <a:lstStyle/>
+                    <a:p>
+                      <a:pPr indent="0" marL="0">
+                        <a:buNone/>
+                      </a:pPr>
+                      <a:r>
+                        <a:rPr lang="en-US" sz="1200" b="1" dirty="0">
+                          <a:solidFill>
+                            <a:srgbClr val="002855"/>
+                          </a:solidFill>
+                          <a:latin typeface="Arial" pitchFamily="34" charset="0"/>
+                          <a:ea typeface="Arial" pitchFamily="34" charset="-122"/>
+                          <a:cs typeface="Arial" pitchFamily="34" charset="-120"/>
+                        </a:rPr>
+                        <a:t>Gate de preparación</a:t>
+                      </a:r>
+                      <a:endParaRPr lang="en-US" sz="1200" dirty="0">
+                        <a:latin typeface="Arial" charset="0"/>
+                        <a:ea typeface="Arial" charset="0"/>
+                        <a:cs typeface="Arial" charset="0"/>
+                      </a:endParaRPr>
+                    </a:p>
+                  </a:txBody>
+                  <a:tcPr marL="54864" marR="54864" marT="54864" marB="54864" anchor="t">
+                    <a:lnL w="9525" cap="flat" cmpd="sng" algn="ctr">
+                      <a:solidFill>
+                        <a:srgbClr val="E2E2E6"/>
+                      </a:solidFill>
+                      <a:prstDash val="solid"/>
+                      <a:round/>
+                      <a:headEnd type="none" w="med" len="med"/>
+                      <a:tailEnd type="none" w="med" len="med"/>
+                    </a:lnL>
+                    <a:lnR w="9525" cap="flat" cmpd="sng" algn="ctr">
+                      <a:solidFill>
+                        <a:srgbClr val="E2E2E6"/>
+                      </a:solidFill>
+                      <a:prstDash val="solid"/>
+                      <a:round/>
+                      <a:headEnd type="none" w="med" len="med"/>
+                      <a:tailEnd type="none" w="med" len="med"/>
+                    </a:lnR>
+                    <a:lnT w="9525" cap="flat" cmpd="sng" algn="ctr">
+                      <a:solidFill>
+                        <a:srgbClr val="E2E2E6"/>
+                      </a:solidFill>
+                      <a:prstDash val="solid"/>
+                      <a:round/>
+                      <a:headEnd type="none" w="med" len="med"/>
+                      <a:tailEnd type="none" w="med" len="med"/>
+                    </a:lnT>
+                    <a:lnB w="9525" cap="flat" cmpd="sng" algn="ctr">
+                      <a:solidFill>
+                        <a:srgbClr val="E2E2E6"/>
+                      </a:solidFill>
+                      <a:prstDash val="solid"/>
+                      <a:round/>
+                      <a:headEnd type="none" w="med" len="med"/>
+                      <a:tailEnd type="none" w="med" len="med"/>
+                    </a:lnB>
+                    <a:solidFill>
+                      <a:srgbClr val="FFFFFF"/>
+                    </a:solidFill>
+                  </a:tcPr>
+                </a:tc>
+                <a:tc>
+                  <a:txBody>
+                    <a:bodyPr/>
+                    <a:lstStyle/>
+                    <a:p>
+                      <a:pPr indent="0" marL="0">
+                        <a:buNone/>
+                      </a:pPr>
+                      <a:r>
+                        <a:rPr lang="en-US" sz="1200" dirty="0">
+                          <a:solidFill>
+                            <a:srgbClr val="272425"/>
+                          </a:solidFill>
+                          <a:latin typeface="Arial" pitchFamily="34" charset="0"/>
+                          <a:ea typeface="Arial" pitchFamily="34" charset="-122"/>
+                          <a:cs typeface="Arial" pitchFamily="34" charset="-120"/>
+                        </a:rPr>
+                        <a:t>Revisión de BMAD antes de construir (implementation readiness): PASS, CONCERNS o FAIL.</a:t>
+                      </a:r>
+                      <a:endParaRPr lang="en-US" sz="1200" dirty="0">
+                        <a:latin typeface="Arial" charset="0"/>
+                        <a:ea typeface="Arial" charset="0"/>
+                        <a:cs typeface="Arial" charset="0"/>
+                      </a:endParaRPr>
+                    </a:p>
+                  </a:txBody>
+                  <a:tcPr marL="54864" marR="54864" marT="54864" marB="54864" anchor="t">
+                    <a:lnL w="9525" cap="flat" cmpd="sng" algn="ctr">
+                      <a:solidFill>
+                        <a:srgbClr val="E2E2E6"/>
+                      </a:solidFill>
+                      <a:prstDash val="solid"/>
+                      <a:round/>
+                      <a:headEnd type="none" w="med" len="med"/>
+                      <a:tailEnd type="none" w="med" len="med"/>
+                    </a:lnL>
+                    <a:lnR w="9525" cap="flat" cmpd="sng" algn="ctr">
+                      <a:solidFill>
+                        <a:srgbClr val="E2E2E6"/>
+                      </a:solidFill>
+                      <a:prstDash val="solid"/>
+                      <a:round/>
+                      <a:headEnd type="none" w="med" len="med"/>
+                      <a:tailEnd type="none" w="med" len="med"/>
+                    </a:lnR>
+                    <a:lnT w="9525" cap="flat" cmpd="sng" algn="ctr">
+                      <a:solidFill>
+                        <a:srgbClr val="E2E2E6"/>
+                      </a:solidFill>
+                      <a:prstDash val="solid"/>
+                      <a:round/>
+                      <a:headEnd type="none" w="med" len="med"/>
+                      <a:tailEnd type="none" w="med" len="med"/>
+                    </a:lnT>
+                    <a:lnB w="9525" cap="flat" cmpd="sng" algn="ctr">
+                      <a:solidFill>
+                        <a:srgbClr val="E2E2E6"/>
+                      </a:solidFill>
+                      <a:prstDash val="solid"/>
+                      <a:round/>
+                      <a:headEnd type="none" w="med" len="med"/>
+                      <a:tailEnd type="none" w="med" len="med"/>
+                    </a:lnB>
+                    <a:solidFill>
+                      <a:srgbClr val="FFFFFF"/>
+                    </a:solidFill>
+                  </a:tcPr>
+                </a:tc>
+              </a:tr>
+              <a:tr h="0">
+                <a:tc>
+                  <a:txBody>
+                    <a:bodyPr/>
+                    <a:lstStyle/>
+                    <a:p>
+                      <a:pPr indent="0" marL="0">
+                        <a:buNone/>
+                      </a:pPr>
+                      <a:r>
+                        <a:rPr lang="en-US" sz="1200" b="1" dirty="0">
+                          <a:solidFill>
+                            <a:srgbClr val="002855"/>
+                          </a:solidFill>
+                          <a:latin typeface="Arial" pitchFamily="34" charset="0"/>
+                          <a:ea typeface="Arial" pitchFamily="34" charset="-122"/>
+                          <a:cs typeface="Arial" pitchFamily="34" charset="-120"/>
+                        </a:rPr>
                         <a:t>Lección aprendida</a:t>
                       </a:r>
                       <a:endParaRPr lang="en-US" sz="1200" dirty="0">
@@ -29853,144 +30548,6 @@
                     </a:lnB>
                     <a:solidFill>
                       <a:srgbClr val="FFFFFF"/>
-                    </a:solidFill>
-                  </a:tcPr>
-                </a:tc>
-              </a:tr>
-              <a:tr h="0">
-                <a:tc>
-                  <a:txBody>
-                    <a:bodyPr/>
-                    <a:lstStyle/>
-                    <a:p>
-                      <a:pPr indent="0" marL="0">
-                        <a:buNone/>
-                      </a:pPr>
-                      <a:r>
-                        <a:rPr lang="en-US" sz="1200" b="1" dirty="0">
-                          <a:solidFill>
-                            <a:srgbClr val="002855"/>
-                          </a:solidFill>
-                          <a:latin typeface="Arial" pitchFamily="34" charset="0"/>
-                          <a:ea typeface="Arial" pitchFamily="34" charset="-122"/>
-                          <a:cs typeface="Arial" pitchFamily="34" charset="-120"/>
-                        </a:rPr>
-                        <a:t>Mapa de recorrido del cliente (customer journey map)</a:t>
-                      </a:r>
-                      <a:endParaRPr lang="en-US" sz="1200" dirty="0">
-                        <a:latin typeface="Arial" charset="0"/>
-                        <a:ea typeface="Arial" charset="0"/>
-                        <a:cs typeface="Arial" charset="0"/>
-                      </a:endParaRPr>
-                    </a:p>
-                  </a:txBody>
-                  <a:tcPr marL="54864" marR="54864" marT="54864" marB="54864" anchor="t">
-                    <a:lnL w="9525" cap="flat" cmpd="sng" algn="ctr">
-                      <a:solidFill>
-                        <a:srgbClr val="E2E2E6"/>
-                      </a:solidFill>
-                      <a:prstDash val="solid"/>
-                      <a:round/>
-                      <a:headEnd type="none" w="med" len="med"/>
-                      <a:tailEnd type="none" w="med" len="med"/>
-                    </a:lnL>
-                    <a:lnR w="9525" cap="flat" cmpd="sng" algn="ctr">
-                      <a:solidFill>
-                        <a:srgbClr val="E2E2E6"/>
-                      </a:solidFill>
-                      <a:prstDash val="solid"/>
-                      <a:round/>
-                      <a:headEnd type="none" w="med" len="med"/>
-                      <a:tailEnd type="none" w="med" len="med"/>
-                    </a:lnR>
-                    <a:lnT w="9525" cap="flat" cmpd="sng" algn="ctr">
-                      <a:solidFill>
-                        <a:srgbClr val="E2E2E6"/>
-                      </a:solidFill>
-                      <a:prstDash val="solid"/>
-                      <a:round/>
-                      <a:headEnd type="none" w="med" len="med"/>
-                      <a:tailEnd type="none" w="med" len="med"/>
-                    </a:lnT>
-                    <a:lnB w="9525" cap="flat" cmpd="sng" algn="ctr">
-                      <a:solidFill>
-                        <a:srgbClr val="E2E2E6"/>
-                      </a:solidFill>
-                      <a:prstDash val="solid"/>
-                      <a:round/>
-                      <a:headEnd type="none" w="med" len="med"/>
-                      <a:tailEnd type="none" w="med" len="med"/>
-                    </a:lnB>
-                    <a:solidFill>
-                      <a:srgbClr val="F4F6F8"/>
-                    </a:solidFill>
-                  </a:tcPr>
-                </a:tc>
-                <a:tc>
-                  <a:txBody>
-                    <a:bodyPr/>
-                    <a:lstStyle/>
-                    <a:p>
-                      <a:pPr indent="0" marL="0">
-                        <a:buNone/>
-                      </a:pPr>
-                      <a:r>
-                        <a:rPr lang="en-US" sz="1200" dirty="0">
-                          <a:solidFill>
-                            <a:srgbClr val="272425"/>
-                          </a:solidFill>
-                          <a:latin typeface="Arial" pitchFamily="34" charset="0"/>
-                          <a:ea typeface="Arial" pitchFamily="34" charset="-122"/>
-                          <a:cs typeface="Arial" pitchFamily="34" charset="-120"/>
-                        </a:rPr>
-                        <a:t>Acciones de una persona paso a paso, con su emoción (−2 a +2) y su fuente, dolores y oportunidades; debajo, los carriles del service blueprint (lo que ve, lo que no ve y los procesos de soporte). Cada dolor necesita un tratamiento (MAP-03).</a:t>
-                      </a:r>
-                      <a:endParaRPr lang="en-US" sz="1200" dirty="0">
-                        <a:latin typeface="Arial" charset="0"/>
-                        <a:ea typeface="Arial" charset="0"/>
-                        <a:cs typeface="Arial" charset="0"/>
-                      </a:endParaRPr>
-                    </a:p>
-                  </a:txBody>
-                  <a:tcPr marL="54864" marR="54864" marT="54864" marB="54864" anchor="t">
-                    <a:lnL w="9525" cap="flat" cmpd="sng" algn="ctr">
-                      <a:solidFill>
-                        <a:srgbClr val="E2E2E6"/>
-                      </a:solidFill>
-                      <a:prstDash val="solid"/>
-                      <a:round/>
-                      <a:headEnd type="none" w="med" len="med"/>
-                      <a:tailEnd type="none" w="med" len="med"/>
-                    </a:lnL>
-                    <a:lnR w="9525" cap="flat" cmpd="sng" algn="ctr">
-                      <a:solidFill>
-                        <a:srgbClr val="E2E2E6"/>
-                      </a:solidFill>
-                      <a:prstDash val="solid"/>
-                      <a:round/>
-                      <a:headEnd type="none" w="med" len="med"/>
-                      <a:tailEnd type="none" w="med" len="med"/>
-                    </a:lnR>
-                    <a:lnT w="9525" cap="flat" cmpd="sng" algn="ctr">
-                      <a:solidFill>
-                        <a:srgbClr val="E2E2E6"/>
-                      </a:solidFill>
-                      <a:prstDash val="solid"/>
-                      <a:round/>
-                      <a:headEnd type="none" w="med" len="med"/>
-                      <a:tailEnd type="none" w="med" len="med"/>
-                    </a:lnT>
-                    <a:lnB w="9525" cap="flat" cmpd="sng" algn="ctr">
-                      <a:solidFill>
-                        <a:srgbClr val="E2E2E6"/>
-                      </a:solidFill>
-                      <a:prstDash val="solid"/>
-                      <a:round/>
-                      <a:headEnd type="none" w="med" len="med"/>
-                      <a:tailEnd type="none" w="med" len="med"/>
-                    </a:lnB>
-                    <a:solidFill>
-                      <a:srgbClr val="F4F6F8"/>
                     </a:solidFill>
                   </a:tcPr>
                 </a:tc>
@@ -30181,7 +30738,7 @@
                           <a:ea typeface="Arial" pitchFamily="34" charset="-122"/>
                           <a:cs typeface="Arial" pitchFamily="34" charset="-120"/>
                         </a:rPr>
-                        <a:t>Paquete de trabajo (work package)</a:t>
+                        <a:t>Mapa de recorrido del cliente (customer journey map)</a:t>
                       </a:r>
                       <a:endParaRPr lang="en-US" sz="1200" dirty="0">
                         <a:latin typeface="Arial" charset="0"/>
@@ -30249,7 +30806,7 @@
                           <a:ea typeface="Arial" pitchFamily="34" charset="-122"/>
                           <a:cs typeface="Arial" pitchFamily="34" charset="-120"/>
                         </a:rPr>
-                        <a:t>Unidad de trabajo autorizada por el gestor; aquí, un sprint con sus historias y definición de terminado.</a:t>
+                        <a:t>Acciones de una persona paso a paso, con su emoción (−2 a +2) y su fuente, dolores y oportunidades; debajo, los carriles del service blueprint (lo que ve, lo que no ve y los procesos de soporte). Cada dolor necesita un tratamiento (MAP-03).</a:t>
                       </a:r>
                       <a:endParaRPr lang="en-US" sz="1200" dirty="0">
                         <a:latin typeface="Arial" charset="0"/>
@@ -30297,6 +30854,144 @@
                     </a:lnB>
                     <a:solidFill>
                       <a:srgbClr val="F4F6F8"/>
+                    </a:solidFill>
+                  </a:tcPr>
+                </a:tc>
+              </a:tr>
+              <a:tr h="0">
+                <a:tc>
+                  <a:txBody>
+                    <a:bodyPr/>
+                    <a:lstStyle/>
+                    <a:p>
+                      <a:pPr indent="0" marL="0">
+                        <a:buNone/>
+                      </a:pPr>
+                      <a:r>
+                        <a:rPr lang="en-US" sz="1200" b="1" dirty="0">
+                          <a:solidFill>
+                            <a:srgbClr val="002855"/>
+                          </a:solidFill>
+                          <a:latin typeface="Arial" pitchFamily="34" charset="0"/>
+                          <a:ea typeface="Arial" pitchFamily="34" charset="-122"/>
+                          <a:cs typeface="Arial" pitchFamily="34" charset="-120"/>
+                        </a:rPr>
+                        <a:t>Paquete de trabajo (work package) e informe de punto de control (checkpoint report)</a:t>
+                      </a:r>
+                      <a:endParaRPr lang="en-US" sz="1200" dirty="0">
+                        <a:latin typeface="Arial" charset="0"/>
+                        <a:ea typeface="Arial" charset="0"/>
+                        <a:cs typeface="Arial" charset="0"/>
+                      </a:endParaRPr>
+                    </a:p>
+                  </a:txBody>
+                  <a:tcPr marL="54864" marR="54864" marT="54864" marB="54864" anchor="t">
+                    <a:lnL w="9525" cap="flat" cmpd="sng" algn="ctr">
+                      <a:solidFill>
+                        <a:srgbClr val="E2E2E6"/>
+                      </a:solidFill>
+                      <a:prstDash val="solid"/>
+                      <a:round/>
+                      <a:headEnd type="none" w="med" len="med"/>
+                      <a:tailEnd type="none" w="med" len="med"/>
+                    </a:lnL>
+                    <a:lnR w="9525" cap="flat" cmpd="sng" algn="ctr">
+                      <a:solidFill>
+                        <a:srgbClr val="E2E2E6"/>
+                      </a:solidFill>
+                      <a:prstDash val="solid"/>
+                      <a:round/>
+                      <a:headEnd type="none" w="med" len="med"/>
+                      <a:tailEnd type="none" w="med" len="med"/>
+                    </a:lnR>
+                    <a:lnT w="9525" cap="flat" cmpd="sng" algn="ctr">
+                      <a:solidFill>
+                        <a:srgbClr val="E2E2E6"/>
+                      </a:solidFill>
+                      <a:prstDash val="solid"/>
+                      <a:round/>
+                      <a:headEnd type="none" w="med" len="med"/>
+                      <a:tailEnd type="none" w="med" len="med"/>
+                    </a:lnT>
+                    <a:lnB w="9525" cap="flat" cmpd="sng" algn="ctr">
+                      <a:solidFill>
+                        <a:srgbClr val="E2E2E6"/>
+                      </a:solidFill>
+                      <a:prstDash val="solid"/>
+                      <a:round/>
+                      <a:headEnd type="none" w="med" len="med"/>
+                      <a:tailEnd type="none" w="med" len="med"/>
+                    </a:lnB>
+                    <a:solidFill>
+                      <a:srgbClr val="FFFFFF"/>
+                    </a:solidFill>
+                  </a:tcPr>
+                </a:tc>
+                <a:tc>
+                  <a:txBody>
+                    <a:bodyPr/>
+                    <a:lstStyle/>
+                    <a:p>
+                      <a:pPr indent="0" marL="0">
+                        <a:buNone/>
+                      </a:pPr>
+                      <a:r>
+                        <a:rPr lang="en-US" sz="1200" dirty="0">
+                          <a:solidFill>
+                            <a:srgbClr val="272425"/>
+                          </a:solidFill>
+                          <a:latin typeface="Arial" pitchFamily="34" charset="0"/>
+                          <a:ea typeface="Arial" pitchFamily="34" charset="-122"/>
+                          <a:cs typeface="Arial" pitchFamily="34" charset="-120"/>
+                        </a:rPr>
+                        <a:t>Unidad de trabajo autorizada por el gestor; aquí, un sprint con sus historias y definición de terminado. En el informe de punto de control del equipo solo cuentan como completados los productos con revisión aprobada.</a:t>
+                      </a:r>
+                      <a:endParaRPr lang="en-US" sz="1200" dirty="0">
+                        <a:latin typeface="Arial" charset="0"/>
+                        <a:ea typeface="Arial" charset="0"/>
+                        <a:cs typeface="Arial" charset="0"/>
+                      </a:endParaRPr>
+                    </a:p>
+                  </a:txBody>
+                  <a:tcPr marL="54864" marR="54864" marT="54864" marB="54864" anchor="t">
+                    <a:lnL w="9525" cap="flat" cmpd="sng" algn="ctr">
+                      <a:solidFill>
+                        <a:srgbClr val="E2E2E6"/>
+                      </a:solidFill>
+                      <a:prstDash val="solid"/>
+                      <a:round/>
+                      <a:headEnd type="none" w="med" len="med"/>
+                      <a:tailEnd type="none" w="med" len="med"/>
+                    </a:lnL>
+                    <a:lnR w="9525" cap="flat" cmpd="sng" algn="ctr">
+                      <a:solidFill>
+                        <a:srgbClr val="E2E2E6"/>
+                      </a:solidFill>
+                      <a:prstDash val="solid"/>
+                      <a:round/>
+                      <a:headEnd type="none" w="med" len="med"/>
+                      <a:tailEnd type="none" w="med" len="med"/>
+                    </a:lnR>
+                    <a:lnT w="9525" cap="flat" cmpd="sng" algn="ctr">
+                      <a:solidFill>
+                        <a:srgbClr val="E2E2E6"/>
+                      </a:solidFill>
+                      <a:prstDash val="solid"/>
+                      <a:round/>
+                      <a:headEnd type="none" w="med" len="med"/>
+                      <a:tailEnd type="none" w="med" len="med"/>
+                    </a:lnT>
+                    <a:lnB w="9525" cap="flat" cmpd="sng" algn="ctr">
+                      <a:solidFill>
+                        <a:srgbClr val="E2E2E6"/>
+                      </a:solidFill>
+                      <a:prstDash val="solid"/>
+                      <a:round/>
+                      <a:headEnd type="none" w="med" len="med"/>
+                      <a:tailEnd type="none" w="med" len="med"/>
+                    </a:lnB>
+                    <a:solidFill>
+                      <a:srgbClr val="FFFFFF"/>
                     </a:solidFill>
                   </a:tcPr>
                 </a:tc>
@@ -30366,7 +31061,7 @@
                       <a:tailEnd type="none" w="med" len="med"/>
                     </a:lnB>
                     <a:solidFill>
-                      <a:srgbClr val="FFFFFF"/>
+                      <a:srgbClr val="F4F6F8"/>
                     </a:solidFill>
                   </a:tcPr>
                 </a:tc>
@@ -30388,144 +31083,6 @@
                           <a:cs typeface="Arial" pitchFamily="34" charset="-120"/>
                         </a:rPr>
                         <a:t>Revisiones posteriores al cierre, a cargo del negocio, con criterio de desvío.</a:t>
-                      </a:r>
-                      <a:endParaRPr lang="en-US" sz="1200" dirty="0">
-                        <a:latin typeface="Arial" charset="0"/>
-                        <a:ea typeface="Arial" charset="0"/>
-                        <a:cs typeface="Arial" charset="0"/>
-                      </a:endParaRPr>
-                    </a:p>
-                  </a:txBody>
-                  <a:tcPr marL="54864" marR="54864" marT="54864" marB="54864" anchor="t">
-                    <a:lnL w="9525" cap="flat" cmpd="sng" algn="ctr">
-                      <a:solidFill>
-                        <a:srgbClr val="E2E2E6"/>
-                      </a:solidFill>
-                      <a:prstDash val="solid"/>
-                      <a:round/>
-                      <a:headEnd type="none" w="med" len="med"/>
-                      <a:tailEnd type="none" w="med" len="med"/>
-                    </a:lnL>
-                    <a:lnR w="9525" cap="flat" cmpd="sng" algn="ctr">
-                      <a:solidFill>
-                        <a:srgbClr val="E2E2E6"/>
-                      </a:solidFill>
-                      <a:prstDash val="solid"/>
-                      <a:round/>
-                      <a:headEnd type="none" w="med" len="med"/>
-                      <a:tailEnd type="none" w="med" len="med"/>
-                    </a:lnR>
-                    <a:lnT w="9525" cap="flat" cmpd="sng" algn="ctr">
-                      <a:solidFill>
-                        <a:srgbClr val="E2E2E6"/>
-                      </a:solidFill>
-                      <a:prstDash val="solid"/>
-                      <a:round/>
-                      <a:headEnd type="none" w="med" len="med"/>
-                      <a:tailEnd type="none" w="med" len="med"/>
-                    </a:lnT>
-                    <a:lnB w="9525" cap="flat" cmpd="sng" algn="ctr">
-                      <a:solidFill>
-                        <a:srgbClr val="E2E2E6"/>
-                      </a:solidFill>
-                      <a:prstDash val="solid"/>
-                      <a:round/>
-                      <a:headEnd type="none" w="med" len="med"/>
-                      <a:tailEnd type="none" w="med" len="med"/>
-                    </a:lnB>
-                    <a:solidFill>
-                      <a:srgbClr val="FFFFFF"/>
-                    </a:solidFill>
-                  </a:tcPr>
-                </a:tc>
-              </a:tr>
-              <a:tr h="0">
-                <a:tc>
-                  <a:txBody>
-                    <a:bodyPr/>
-                    <a:lstStyle/>
-                    <a:p>
-                      <a:pPr indent="0" marL="0">
-                        <a:buNone/>
-                      </a:pPr>
-                      <a:r>
-                        <a:rPr lang="en-US" sz="1200" b="1" dirty="0">
-                          <a:solidFill>
-                            <a:srgbClr val="002855"/>
-                          </a:solidFill>
-                          <a:latin typeface="Arial" pitchFamily="34" charset="0"/>
-                          <a:ea typeface="Arial" pitchFamily="34" charset="-122"/>
-                          <a:cs typeface="Arial" pitchFamily="34" charset="-120"/>
-                        </a:rPr>
-                        <a:t>Presupuesto de cambio</a:t>
-                      </a:r>
-                      <a:endParaRPr lang="en-US" sz="1200" dirty="0">
-                        <a:latin typeface="Arial" charset="0"/>
-                        <a:ea typeface="Arial" charset="0"/>
-                        <a:cs typeface="Arial" charset="0"/>
-                      </a:endParaRPr>
-                    </a:p>
-                  </a:txBody>
-                  <a:tcPr marL="54864" marR="54864" marT="54864" marB="54864" anchor="t">
-                    <a:lnL w="9525" cap="flat" cmpd="sng" algn="ctr">
-                      <a:solidFill>
-                        <a:srgbClr val="E2E2E6"/>
-                      </a:solidFill>
-                      <a:prstDash val="solid"/>
-                      <a:round/>
-                      <a:headEnd type="none" w="med" len="med"/>
-                      <a:tailEnd type="none" w="med" len="med"/>
-                    </a:lnL>
-                    <a:lnR w="9525" cap="flat" cmpd="sng" algn="ctr">
-                      <a:solidFill>
-                        <a:srgbClr val="E2E2E6"/>
-                      </a:solidFill>
-                      <a:prstDash val="solid"/>
-                      <a:round/>
-                      <a:headEnd type="none" w="med" len="med"/>
-                      <a:tailEnd type="none" w="med" len="med"/>
-                    </a:lnR>
-                    <a:lnT w="9525" cap="flat" cmpd="sng" algn="ctr">
-                      <a:solidFill>
-                        <a:srgbClr val="E2E2E6"/>
-                      </a:solidFill>
-                      <a:prstDash val="solid"/>
-                      <a:round/>
-                      <a:headEnd type="none" w="med" len="med"/>
-                      <a:tailEnd type="none" w="med" len="med"/>
-                    </a:lnT>
-                    <a:lnB w="9525" cap="flat" cmpd="sng" algn="ctr">
-                      <a:solidFill>
-                        <a:srgbClr val="E2E2E6"/>
-                      </a:solidFill>
-                      <a:prstDash val="solid"/>
-                      <a:round/>
-                      <a:headEnd type="none" w="med" len="med"/>
-                      <a:tailEnd type="none" w="med" len="med"/>
-                    </a:lnB>
-                    <a:solidFill>
-                      <a:srgbClr val="F4F6F8"/>
-                    </a:solidFill>
-                  </a:tcPr>
-                </a:tc>
-                <a:tc>
-                  <a:txBody>
-                    <a:bodyPr/>
-                    <a:lstStyle/>
-                    <a:p>
-                      <a:pPr indent="0" marL="0">
-                        <a:buNone/>
-                      </a:pPr>
-                      <a:r>
-                        <a:rPr lang="en-US" sz="1200" dirty="0">
-                          <a:solidFill>
-                            <a:srgbClr val="272425"/>
-                          </a:solidFill>
-                          <a:latin typeface="Arial" pitchFamily="34" charset="0"/>
-                          <a:ea typeface="Arial" pitchFamily="34" charset="-122"/>
-                          <a:cs typeface="Arial" pitchFamily="34" charset="-120"/>
-                        </a:rPr>
-                        <a:t>Monto que la junta reserva para cambios aprobados; su consumo lo informa CAM-03.</a:t>
                       </a:r>
                       <a:endParaRPr lang="en-US" sz="1200" dirty="0">
                         <a:latin typeface="Arial" charset="0"/>
@@ -30711,144 +31268,6 @@
                     </a:lnB>
                     <a:solidFill>
                       <a:srgbClr val="FFFFFF"/>
-                    </a:solidFill>
-                  </a:tcPr>
-                </a:tc>
-              </a:tr>
-              <a:tr h="0">
-                <a:tc>
-                  <a:txBody>
-                    <a:bodyPr/>
-                    <a:lstStyle/>
-                    <a:p>
-                      <a:pPr indent="0" marL="0">
-                        <a:buNone/>
-                      </a:pPr>
-                      <a:r>
-                        <a:rPr lang="en-US" sz="1200" b="1" dirty="0">
-                          <a:solidFill>
-                            <a:srgbClr val="002855"/>
-                          </a:solidFill>
-                          <a:latin typeface="Arial" pitchFamily="34" charset="0"/>
-                          <a:ea typeface="Arial" pitchFamily="34" charset="-122"/>
-                          <a:cs typeface="Arial" pitchFamily="34" charset="-120"/>
-                        </a:rPr>
-                        <a:t>Registro de calidad (quality register)</a:t>
-                      </a:r>
-                      <a:endParaRPr lang="en-US" sz="1200" dirty="0">
-                        <a:latin typeface="Arial" charset="0"/>
-                        <a:ea typeface="Arial" charset="0"/>
-                        <a:cs typeface="Arial" charset="0"/>
-                      </a:endParaRPr>
-                    </a:p>
-                  </a:txBody>
-                  <a:tcPr marL="54864" marR="54864" marT="54864" marB="54864" anchor="t">
-                    <a:lnL w="9525" cap="flat" cmpd="sng" algn="ctr">
-                      <a:solidFill>
-                        <a:srgbClr val="E2E2E6"/>
-                      </a:solidFill>
-                      <a:prstDash val="solid"/>
-                      <a:round/>
-                      <a:headEnd type="none" w="med" len="med"/>
-                      <a:tailEnd type="none" w="med" len="med"/>
-                    </a:lnL>
-                    <a:lnR w="9525" cap="flat" cmpd="sng" algn="ctr">
-                      <a:solidFill>
-                        <a:srgbClr val="E2E2E6"/>
-                      </a:solidFill>
-                      <a:prstDash val="solid"/>
-                      <a:round/>
-                      <a:headEnd type="none" w="med" len="med"/>
-                      <a:tailEnd type="none" w="med" len="med"/>
-                    </a:lnR>
-                    <a:lnT w="9525" cap="flat" cmpd="sng" algn="ctr">
-                      <a:solidFill>
-                        <a:srgbClr val="E2E2E6"/>
-                      </a:solidFill>
-                      <a:prstDash val="solid"/>
-                      <a:round/>
-                      <a:headEnd type="none" w="med" len="med"/>
-                      <a:tailEnd type="none" w="med" len="med"/>
-                    </a:lnT>
-                    <a:lnB w="9525" cap="flat" cmpd="sng" algn="ctr">
-                      <a:solidFill>
-                        <a:srgbClr val="E2E2E6"/>
-                      </a:solidFill>
-                      <a:prstDash val="solid"/>
-                      <a:round/>
-                      <a:headEnd type="none" w="med" len="med"/>
-                      <a:tailEnd type="none" w="med" len="med"/>
-                    </a:lnB>
-                    <a:solidFill>
-                      <a:srgbClr val="F4F6F8"/>
-                    </a:solidFill>
-                  </a:tcPr>
-                </a:tc>
-                <a:tc>
-                  <a:txBody>
-                    <a:bodyPr/>
-                    <a:lstStyle/>
-                    <a:p>
-                      <a:pPr indent="0" marL="0">
-                        <a:buNone/>
-                      </a:pPr>
-                      <a:r>
-                        <a:rPr lang="en-US" sz="1200" dirty="0">
-                          <a:solidFill>
-                            <a:srgbClr val="272425"/>
-                          </a:solidFill>
-                          <a:latin typeface="Arial" pitchFamily="34" charset="0"/>
-                          <a:ea typeface="Arial" pitchFamily="34" charset="-122"/>
-                          <a:cs typeface="Arial" pitchFamily="34" charset="-120"/>
-                        </a:rPr>
-                        <a:t>calidad.csv: una revisión por producto con criterios, responsables, resultado y fechas.</a:t>
-                      </a:r>
-                      <a:endParaRPr lang="en-US" sz="1200" dirty="0">
-                        <a:latin typeface="Arial" charset="0"/>
-                        <a:ea typeface="Arial" charset="0"/>
-                        <a:cs typeface="Arial" charset="0"/>
-                      </a:endParaRPr>
-                    </a:p>
-                  </a:txBody>
-                  <a:tcPr marL="54864" marR="54864" marT="54864" marB="54864" anchor="t">
-                    <a:lnL w="9525" cap="flat" cmpd="sng" algn="ctr">
-                      <a:solidFill>
-                        <a:srgbClr val="E2E2E6"/>
-                      </a:solidFill>
-                      <a:prstDash val="solid"/>
-                      <a:round/>
-                      <a:headEnd type="none" w="med" len="med"/>
-                      <a:tailEnd type="none" w="med" len="med"/>
-                    </a:lnL>
-                    <a:lnR w="9525" cap="flat" cmpd="sng" algn="ctr">
-                      <a:solidFill>
-                        <a:srgbClr val="E2E2E6"/>
-                      </a:solidFill>
-                      <a:prstDash val="solid"/>
-                      <a:round/>
-                      <a:headEnd type="none" w="med" len="med"/>
-                      <a:tailEnd type="none" w="med" len="med"/>
-                    </a:lnR>
-                    <a:lnT w="9525" cap="flat" cmpd="sng" algn="ctr">
-                      <a:solidFill>
-                        <a:srgbClr val="E2E2E6"/>
-                      </a:solidFill>
-                      <a:prstDash val="solid"/>
-                      <a:round/>
-                      <a:headEnd type="none" w="med" len="med"/>
-                      <a:tailEnd type="none" w="med" len="med"/>
-                    </a:lnT>
-                    <a:lnB w="9525" cap="flat" cmpd="sng" algn="ctr">
-                      <a:solidFill>
-                        <a:srgbClr val="E2E2E6"/>
-                      </a:solidFill>
-                      <a:prstDash val="solid"/>
-                      <a:round/>
-                      <a:headEnd type="none" w="med" len="med"/>
-                      <a:tailEnd type="none" w="med" len="med"/>
-                    </a:lnB>
-                    <a:solidFill>
-                      <a:srgbClr val="F4F6F8"/>
                     </a:solidFill>
                   </a:tcPr>
                 </a:tc>
@@ -31150,6 +31569,144 @@
                           <a:ea typeface="Arial" pitchFamily="34" charset="-122"/>
                           <a:cs typeface="Arial" pitchFamily="34" charset="-120"/>
                         </a:rPr>
+                        <a:t>Registro de calidad (quality register)</a:t>
+                      </a:r>
+                      <a:endParaRPr lang="en-US" sz="1200" dirty="0">
+                        <a:latin typeface="Arial" charset="0"/>
+                        <a:ea typeface="Arial" charset="0"/>
+                        <a:cs typeface="Arial" charset="0"/>
+                      </a:endParaRPr>
+                    </a:p>
+                  </a:txBody>
+                  <a:tcPr marL="54864" marR="54864" marT="54864" marB="54864" anchor="t">
+                    <a:lnL w="9525" cap="flat" cmpd="sng" algn="ctr">
+                      <a:solidFill>
+                        <a:srgbClr val="E2E2E6"/>
+                      </a:solidFill>
+                      <a:prstDash val="solid"/>
+                      <a:round/>
+                      <a:headEnd type="none" w="med" len="med"/>
+                      <a:tailEnd type="none" w="med" len="med"/>
+                    </a:lnL>
+                    <a:lnR w="9525" cap="flat" cmpd="sng" algn="ctr">
+                      <a:solidFill>
+                        <a:srgbClr val="E2E2E6"/>
+                      </a:solidFill>
+                      <a:prstDash val="solid"/>
+                      <a:round/>
+                      <a:headEnd type="none" w="med" len="med"/>
+                      <a:tailEnd type="none" w="med" len="med"/>
+                    </a:lnR>
+                    <a:lnT w="9525" cap="flat" cmpd="sng" algn="ctr">
+                      <a:solidFill>
+                        <a:srgbClr val="E2E2E6"/>
+                      </a:solidFill>
+                      <a:prstDash val="solid"/>
+                      <a:round/>
+                      <a:headEnd type="none" w="med" len="med"/>
+                      <a:tailEnd type="none" w="med" len="med"/>
+                    </a:lnT>
+                    <a:lnB w="9525" cap="flat" cmpd="sng" algn="ctr">
+                      <a:solidFill>
+                        <a:srgbClr val="E2E2E6"/>
+                      </a:solidFill>
+                      <a:prstDash val="solid"/>
+                      <a:round/>
+                      <a:headEnd type="none" w="med" len="med"/>
+                      <a:tailEnd type="none" w="med" len="med"/>
+                    </a:lnB>
+                    <a:solidFill>
+                      <a:srgbClr val="F4F6F8"/>
+                    </a:solidFill>
+                  </a:tcPr>
+                </a:tc>
+                <a:tc>
+                  <a:txBody>
+                    <a:bodyPr/>
+                    <a:lstStyle/>
+                    <a:p>
+                      <a:pPr indent="0" marL="0">
+                        <a:buNone/>
+                      </a:pPr>
+                      <a:r>
+                        <a:rPr lang="en-US" sz="1200" dirty="0">
+                          <a:solidFill>
+                            <a:srgbClr val="272425"/>
+                          </a:solidFill>
+                          <a:latin typeface="Arial" pitchFamily="34" charset="0"/>
+                          <a:ea typeface="Arial" pitchFamily="34" charset="-122"/>
+                          <a:cs typeface="Arial" pitchFamily="34" charset="-120"/>
+                        </a:rPr>
+                        <a:t>calidad.csv: una revisión por producto con criterios, responsables, resultado y fechas.</a:t>
+                      </a:r>
+                      <a:endParaRPr lang="en-US" sz="1200" dirty="0">
+                        <a:latin typeface="Arial" charset="0"/>
+                        <a:ea typeface="Arial" charset="0"/>
+                        <a:cs typeface="Arial" charset="0"/>
+                      </a:endParaRPr>
+                    </a:p>
+                  </a:txBody>
+                  <a:tcPr marL="54864" marR="54864" marT="54864" marB="54864" anchor="t">
+                    <a:lnL w="9525" cap="flat" cmpd="sng" algn="ctr">
+                      <a:solidFill>
+                        <a:srgbClr val="E2E2E6"/>
+                      </a:solidFill>
+                      <a:prstDash val="solid"/>
+                      <a:round/>
+                      <a:headEnd type="none" w="med" len="med"/>
+                      <a:tailEnd type="none" w="med" len="med"/>
+                    </a:lnL>
+                    <a:lnR w="9525" cap="flat" cmpd="sng" algn="ctr">
+                      <a:solidFill>
+                        <a:srgbClr val="E2E2E6"/>
+                      </a:solidFill>
+                      <a:prstDash val="solid"/>
+                      <a:round/>
+                      <a:headEnd type="none" w="med" len="med"/>
+                      <a:tailEnd type="none" w="med" len="med"/>
+                    </a:lnR>
+                    <a:lnT w="9525" cap="flat" cmpd="sng" algn="ctr">
+                      <a:solidFill>
+                        <a:srgbClr val="E2E2E6"/>
+                      </a:solidFill>
+                      <a:prstDash val="solid"/>
+                      <a:round/>
+                      <a:headEnd type="none" w="med" len="med"/>
+                      <a:tailEnd type="none" w="med" len="med"/>
+                    </a:lnT>
+                    <a:lnB w="9525" cap="flat" cmpd="sng" algn="ctr">
+                      <a:solidFill>
+                        <a:srgbClr val="E2E2E6"/>
+                      </a:solidFill>
+                      <a:prstDash val="solid"/>
+                      <a:round/>
+                      <a:headEnd type="none" w="med" len="med"/>
+                      <a:tailEnd type="none" w="med" len="med"/>
+                    </a:lnB>
+                    <a:solidFill>
+                      <a:srgbClr val="F4F6F8"/>
+                    </a:solidFill>
+                  </a:tcPr>
+                </a:tc>
+              </a:tr>
+              <a:tr h="0">
+                <a:tc>
+                  <a:txBody>
+                    <a:bodyPr/>
+                    <a:lstStyle/>
+                    <a:p>
+                      <a:pPr indent="0" marL="0">
+                        <a:buNone/>
+                      </a:pPr>
+                      <a:r>
+                        <a:rPr lang="en-US" sz="1200" b="1" dirty="0">
+                          <a:solidFill>
+                            <a:srgbClr val="002855"/>
+                          </a:solidFill>
+                          <a:latin typeface="Arial" pitchFamily="34" charset="0"/>
+                          <a:ea typeface="Arial" pitchFamily="34" charset="-122"/>
+                          <a:cs typeface="Arial" pitchFamily="34" charset="-120"/>
+                        </a:rPr>
                         <a:t>Registro e informe de lecciones (lessons log and report)</a:t>
                       </a:r>
                       <a:endParaRPr lang="en-US" sz="1200" dirty="0">
@@ -31197,7 +31754,7 @@
                       <a:tailEnd type="none" w="med" len="med"/>
                     </a:lnB>
                     <a:solidFill>
-                      <a:srgbClr val="F4F6F8"/>
+                      <a:srgbClr val="FFFFFF"/>
                     </a:solidFill>
                   </a:tcPr>
                 </a:tc>
@@ -31265,7 +31822,7 @@
                       <a:tailEnd type="none" w="med" len="med"/>
                     </a:lnB>
                     <a:solidFill>
-                      <a:srgbClr val="F4F6F8"/>
+                      <a:srgbClr val="FFFFFF"/>
                     </a:solidFill>
                   </a:tcPr>
                 </a:tc>
@@ -31335,7 +31892,7 @@
                       <a:tailEnd type="none" w="med" len="med"/>
                     </a:lnB>
                     <a:solidFill>
-                      <a:srgbClr val="FFFFFF"/>
+                      <a:srgbClr val="F4F6F8"/>
                     </a:solidFill>
                   </a:tcPr>
                 </a:tc>
@@ -31403,7 +31960,7 @@
                       <a:tailEnd type="none" w="med" len="med"/>
                     </a:lnB>
                     <a:solidFill>
-                      <a:srgbClr val="FFFFFF"/>
+                      <a:srgbClr val="F4F6F8"/>
                     </a:solidFill>
                   </a:tcPr>
                 </a:tc>
@@ -31473,7 +32030,7 @@
                       <a:tailEnd type="none" w="med" len="med"/>
                     </a:lnB>
                     <a:solidFill>
-                      <a:srgbClr val="F4F6F8"/>
+                      <a:srgbClr val="FFFFFF"/>
                     </a:solidFill>
                   </a:tcPr>
                 </a:tc>
@@ -31541,7 +32098,7 @@
                       <a:tailEnd type="none" w="med" len="med"/>
                     </a:lnB>
                     <a:solidFill>
-                      <a:srgbClr val="F4F6F8"/>
+                      <a:srgbClr val="FFFFFF"/>
                     </a:solidFill>
                   </a:tcPr>
                 </a:tc>

--- a/docs/webinar/E2E-4/E2E-4-diapositivas.pptx
+++ b/docs/webinar/E2E-4/E2E-4-diapositivas.pptx
@@ -152,12 +152,12 @@
   <p:extLst>
     <p:ext uri="{521415D9-36F7-43E2-AB2F-B90AF26B5E84}">
       <p14:sectionLst xmlns:p14="http://schemas.microsoft.com/office/powerpoint/2010/main">
-        <p14:section name="Portada" id="{994dcd81-9a37-5a86-db3b-82fa6a7a6c16}">
+        <p14:section name="Portada" id="{410ddec0-659b-5cc7-0820-3d74115b2e77}">
           <p14:sldIdLst>
             <p14:sldId id="256"/>
           </p14:sldIdLst>
         </p14:section>
-        <p14:section name="Clase 1 · Gobernar la construcción con BMAD" id="{7c5e6377-db45-08ef-851c-814e0157400d}">
+        <p14:section name="Clase 1 · Gobernar la construcción con BMAD" id="{1a497516-c9dc-2673-220a-54591ec0f043}">
           <p14:sldIdLst>
             <p14:sldId id="257"/>
             <p14:sldId id="258"/>
@@ -182,7 +182,7 @@
             <p14:sldId id="277"/>
           </p14:sldIdLst>
         </p14:section>
-        <p14:section name="Clase 2 · Recorrido, lecciones, cierre y beneficios" id="{d15f33fe-5c8f-d5ac-0b3a-f66875daeb1f}">
+        <p14:section name="Clase 2 · Recorrido, lecciones, cierre y beneficios" id="{ced754f9-baee-1733-52ef-acaa8b7fac4a}">
           <p14:sldIdLst>
             <p14:sldId id="278"/>
             <p14:sldId id="279"/>
@@ -207,7 +207,7 @@
             <p14:sldId id="298"/>
           </p14:sldIdLst>
         </p14:section>
-        <p14:section name="Glosario" id="{744a4bf5-aa5a-38e2-ba88-80c0afc55026}">
+        <p14:section name="Glosario" id="{cbc41ba7-a84a-3b80-24da-0349d3de04b6}">
           <p14:sldIdLst>
             <p14:sldId id="299"/>
             <p14:sldId id="300"/>
@@ -4809,7 +4809,7 @@
                   <a:srgbClr val="D6E4F0"/>
                 </a:solidFill>
               </a:rPr>
-              <a:t>pm-method 2.6.0 · Webinar E2E-4 · Clase 1</a:t>
+              <a:t>pm-method 2.7.0 · Webinar E2E-4 · Clase 1</a:t>
             </a:r>
             <a:endParaRPr lang="en-US" sz="1000" dirty="0"/>
           </a:p>
@@ -5049,7 +5049,7 @@
                   <a:srgbClr val="696969"/>
                 </a:solidFill>
               </a:rPr>
-              <a:t>pm-method 2.6.0 · Webinar E2E-4 · Clase 2</a:t>
+              <a:t>pm-method 2.7.0 · Webinar E2E-4 · Clase 2</a:t>
             </a:r>
             <a:endParaRPr lang="en-US" sz="1000" dirty="0"/>
           </a:p>
@@ -5267,7 +5267,7 @@
                   <a:srgbClr val="D6E4F0"/>
                 </a:solidFill>
               </a:rPr>
-              <a:t>pm-method 2.6.0 · Webinar E2E-4 · Clase 2</a:t>
+              <a:t>pm-method 2.7.0 · Webinar E2E-4 · Clase 2</a:t>
             </a:r>
             <a:endParaRPr lang="en-US" sz="1000" dirty="0"/>
           </a:p>
@@ -5485,7 +5485,7 @@
                   <a:srgbClr val="D6E4F0"/>
                 </a:solidFill>
               </a:rPr>
-              <a:t>pm-method 2.6.0 · Webinar E2E-4 · Clase 2</a:t>
+              <a:t>pm-method 2.7.0 · Webinar E2E-4 · Clase 2</a:t>
             </a:r>
             <a:endParaRPr lang="en-US" sz="1000" dirty="0"/>
           </a:p>
@@ -5703,7 +5703,7 @@
                   <a:srgbClr val="D6E4F0"/>
                 </a:solidFill>
               </a:rPr>
-              <a:t>pm-method 2.6.0 · Webinar E2E-4 · Clase 2</a:t>
+              <a:t>pm-method 2.7.0 · Webinar E2E-4 · Clase 2</a:t>
             </a:r>
             <a:endParaRPr lang="en-US" sz="1000" dirty="0"/>
           </a:p>
@@ -5879,7 +5879,7 @@
                   <a:srgbClr val="D6E4F0"/>
                 </a:solidFill>
               </a:rPr>
-              <a:t>pm-method 2.6.0 · Webinar E2E-4</a:t>
+              <a:t>pm-method 2.7.0 · Webinar E2E-4</a:t>
             </a:r>
             <a:endParaRPr lang="en-US" sz="1000" dirty="0"/>
           </a:p>
@@ -6074,7 +6074,7 @@
                   <a:srgbClr val="696969"/>
                 </a:solidFill>
               </a:rPr>
-              <a:t>pm-method 2.6.0 · Webinar E2E-4</a:t>
+              <a:t>pm-method 2.7.0 · Webinar E2E-4</a:t>
             </a:r>
             <a:endParaRPr lang="en-US" sz="1000" dirty="0"/>
           </a:p>
@@ -6292,7 +6292,7 @@
                   <a:srgbClr val="D6E4F0"/>
                 </a:solidFill>
               </a:rPr>
-              <a:t>pm-method 2.6.0 · Webinar E2E-4</a:t>
+              <a:t>pm-method 2.7.0 · Webinar E2E-4</a:t>
             </a:r>
             <a:endParaRPr lang="en-US" sz="1000" dirty="0"/>
           </a:p>
@@ -6510,7 +6510,7 @@
                   <a:srgbClr val="D6E4F0"/>
                 </a:solidFill>
               </a:rPr>
-              <a:t>pm-method 2.6.0 · Webinar E2E-4</a:t>
+              <a:t>pm-method 2.7.0 · Webinar E2E-4</a:t>
             </a:r>
             <a:endParaRPr lang="en-US" sz="1000" dirty="0"/>
           </a:p>
@@ -6728,7 +6728,7 @@
                   <a:srgbClr val="D6E4F0"/>
                 </a:solidFill>
               </a:rPr>
-              <a:t>pm-method 2.6.0 · Webinar E2E-4</a:t>
+              <a:t>pm-method 2.7.0 · Webinar E2E-4</a:t>
             </a:r>
             <a:endParaRPr lang="en-US" sz="1000" dirty="0"/>
           </a:p>
@@ -6968,7 +6968,7 @@
                   <a:srgbClr val="696969"/>
                 </a:solidFill>
               </a:rPr>
-              <a:t>pm-method 2.6.0 · Webinar E2E-4 · Clase 1</a:t>
+              <a:t>pm-method 2.7.0 · Webinar E2E-4 · Clase 1</a:t>
             </a:r>
             <a:endParaRPr lang="en-US" sz="1000" dirty="0"/>
           </a:p>
@@ -7186,7 +7186,7 @@
                   <a:srgbClr val="D6E4F0"/>
                 </a:solidFill>
               </a:rPr>
-              <a:t>pm-method 2.6.0 · Webinar E2E-4 · Clase 1</a:t>
+              <a:t>pm-method 2.7.0 · Webinar E2E-4 · Clase 1</a:t>
             </a:r>
             <a:endParaRPr lang="en-US" sz="1000" dirty="0"/>
           </a:p>
@@ -7404,7 +7404,7 @@
                   <a:srgbClr val="D6E4F0"/>
                 </a:solidFill>
               </a:rPr>
-              <a:t>pm-method 2.6.0 · Webinar E2E-4 · Clase 1</a:t>
+              <a:t>pm-method 2.7.0 · Webinar E2E-4 · Clase 1</a:t>
             </a:r>
             <a:endParaRPr lang="en-US" sz="1000" dirty="0"/>
           </a:p>
@@ -7848,7 +7848,7 @@
                 <a:ea typeface="Arial" pitchFamily="34" charset="-122"/>
                 <a:cs typeface="Arial" pitchFamily="34" charset="-120"/>
               </a:rPr>
-              <a:t>Webinar · pm-method 2.6.0 · E2E-4</a:t>
+              <a:t>Webinar · pm-method 2.7.0 · E2E-4</a:t>
             </a:r>
             <a:endParaRPr lang="en-US" sz="1600" dirty="0"/>
           </a:p>
